--- a/Seasonal_Agriculture_Performance_Analysis_Major_Project_Presentation.pptx
+++ b/Seasonal_Agriculture_Performance_Analysis_Major_Project_Presentation.pptx
@@ -263,7 +263,7 @@
           <a:p>
             <a:fld id="{EF1077DB-935E-4A0A-947A-D283B9F9F452}" type="datetimeFigureOut">
               <a:rPr lang="en-US" smtClean="0"/>
-              <a:t>9/3/2026</a:t>
+              <a:t>9/5/2026</a:t>
             </a:fld>
             <a:endParaRPr lang="en-US" dirty="0"/>
           </a:p>
@@ -440,7 +440,7 @@
           <a:p>
             <a:fld id="{2D9EC30E-1A71-4188-9BE7-E2A64929A436}" type="datetimeFigureOut">
               <a:rPr lang="en-US" noProof="0" smtClean="0"/>
-              <a:t>9/3/2026</a:t>
+              <a:t>9/5/2026</a:t>
             </a:fld>
             <a:endParaRPr lang="en-US" noProof="0" dirty="0"/>
           </a:p>
@@ -1537,7 +1537,7 @@
             <a:fld id="{B61BEF0D-F0BB-DE4B-95CE-6DB70DBA9567}" type="datetimeFigureOut">
               <a:rPr lang="en-US" smtClean="0"/>
               <a:pPr/>
-              <a:t>9/3/2026</a:t>
+              <a:t>9/5/2026</a:t>
             </a:fld>
             <a:endParaRPr lang="en-US" dirty="0"/>
           </a:p>
@@ -1791,7 +1791,7 @@
             <a:fld id="{B61BEF0D-F0BB-DE4B-95CE-6DB70DBA9567}" type="datetimeFigureOut">
               <a:rPr lang="en-US" smtClean="0"/>
               <a:pPr/>
-              <a:t>9/3/2026</a:t>
+              <a:t>9/5/2026</a:t>
             </a:fld>
             <a:endParaRPr lang="en-US" dirty="0"/>
           </a:p>
@@ -2108,7 +2108,7 @@
             <a:fld id="{B61BEF0D-F0BB-DE4B-95CE-6DB70DBA9567}" type="datetimeFigureOut">
               <a:rPr lang="en-US" smtClean="0"/>
               <a:pPr/>
-              <a:t>9/3/2026</a:t>
+              <a:t>9/5/2026</a:t>
             </a:fld>
             <a:endParaRPr lang="en-US" dirty="0"/>
           </a:p>
@@ -2444,7 +2444,7 @@
             <a:fld id="{B61BEF0D-F0BB-DE4B-95CE-6DB70DBA9567}" type="datetimeFigureOut">
               <a:rPr lang="en-US" smtClean="0"/>
               <a:pPr/>
-              <a:t>9/3/2026</a:t>
+              <a:t>9/5/2026</a:t>
             </a:fld>
             <a:endParaRPr lang="en-US" dirty="0"/>
           </a:p>
@@ -2761,7 +2761,7 @@
             <a:fld id="{B61BEF0D-F0BB-DE4B-95CE-6DB70DBA9567}" type="datetimeFigureOut">
               <a:rPr lang="en-US" smtClean="0"/>
               <a:pPr/>
-              <a:t>9/3/2026</a:t>
+              <a:t>9/5/2026</a:t>
             </a:fld>
             <a:endParaRPr lang="en-US" dirty="0"/>
           </a:p>
@@ -3157,7 +3157,7 @@
             <a:fld id="{B61BEF0D-F0BB-DE4B-95CE-6DB70DBA9567}" type="datetimeFigureOut">
               <a:rPr lang="en-US" smtClean="0"/>
               <a:pPr/>
-              <a:t>9/3/2026</a:t>
+              <a:t>9/5/2026</a:t>
             </a:fld>
             <a:endParaRPr lang="en-US" dirty="0"/>
           </a:p>
@@ -3329,7 +3329,7 @@
           <a:p>
             <a:fld id="{55C6B4A9-1611-4792-9094-5F34BCA07E0B}" type="datetimeFigureOut">
               <a:rPr lang="en-US" smtClean="0"/>
-              <a:t>9/3/2026</a:t>
+              <a:t>9/5/2026</a:t>
             </a:fld>
             <a:endParaRPr lang="en-US" dirty="0"/>
           </a:p>
@@ -3511,7 +3511,7 @@
             <a:fld id="{B61BEF0D-F0BB-DE4B-95CE-6DB70DBA9567}" type="datetimeFigureOut">
               <a:rPr lang="en-US" smtClean="0"/>
               <a:pPr/>
-              <a:t>9/3/2026</a:t>
+              <a:t>9/5/2026</a:t>
             </a:fld>
             <a:endParaRPr lang="en-US" dirty="0"/>
           </a:p>
@@ -5240,7 +5240,7 @@
             <a:fld id="{B61BEF0D-F0BB-DE4B-95CE-6DB70DBA9567}" type="datetimeFigureOut">
               <a:rPr lang="en-US" smtClean="0"/>
               <a:pPr/>
-              <a:t>9/3/2026</a:t>
+              <a:t>9/5/2026</a:t>
             </a:fld>
             <a:endParaRPr lang="en-US" dirty="0"/>
           </a:p>
@@ -6975,7 +6975,7 @@
             <a:fld id="{B61BEF0D-F0BB-DE4B-95CE-6DB70DBA9567}" type="datetimeFigureOut">
               <a:rPr lang="en-US" smtClean="0"/>
               <a:pPr/>
-              <a:t>9/3/2026</a:t>
+              <a:t>9/5/2026</a:t>
             </a:fld>
             <a:endParaRPr lang="en-US" dirty="0"/>
           </a:p>
@@ -7209,7 +7209,7 @@
           <a:p>
             <a:fld id="{EB712588-04B1-427B-82EE-E8DB90309F08}" type="datetimeFigureOut">
               <a:rPr lang="en-US" smtClean="0"/>
-              <a:t>9/3/2026</a:t>
+              <a:t>9/5/2026</a:t>
             </a:fld>
             <a:endParaRPr lang="en-US" dirty="0"/>
           </a:p>
@@ -7585,7 +7585,7 @@
             <a:fld id="{B61BEF0D-F0BB-DE4B-95CE-6DB70DBA9567}" type="datetimeFigureOut">
               <a:rPr lang="en-US" smtClean="0"/>
               <a:pPr/>
-              <a:t>9/3/2026</a:t>
+              <a:t>9/5/2026</a:t>
             </a:fld>
             <a:endParaRPr lang="en-US" dirty="0"/>
           </a:p>
@@ -7711,7 +7711,7 @@
             <a:fld id="{B61BEF0D-F0BB-DE4B-95CE-6DB70DBA9567}" type="datetimeFigureOut">
               <a:rPr lang="en-US" smtClean="0"/>
               <a:pPr/>
-              <a:t>9/3/2026</a:t>
+              <a:t>9/5/2026</a:t>
             </a:fld>
             <a:endParaRPr lang="en-US" dirty="0"/>
           </a:p>
@@ -7809,7 +7809,7 @@
             <a:fld id="{B61BEF0D-F0BB-DE4B-95CE-6DB70DBA9567}" type="datetimeFigureOut">
               <a:rPr lang="en-US" smtClean="0"/>
               <a:pPr/>
-              <a:t>9/3/2026</a:t>
+              <a:t>9/5/2026</a:t>
             </a:fld>
             <a:endParaRPr lang="en-US" dirty="0"/>
           </a:p>
@@ -8066,7 +8066,7 @@
           <a:p>
             <a:fld id="{42A54C80-263E-416B-A8E0-580EDEADCBDC}" type="datetimeFigureOut">
               <a:rPr lang="en-US" smtClean="0"/>
-              <a:t>9/3/2026</a:t>
+              <a:t>9/5/2026</a:t>
             </a:fld>
             <a:endParaRPr lang="en-US" dirty="0"/>
           </a:p>
@@ -8374,7 +8374,7 @@
             <a:fld id="{B61BEF0D-F0BB-DE4B-95CE-6DB70DBA9567}" type="datetimeFigureOut">
               <a:rPr lang="en-US" smtClean="0"/>
               <a:pPr/>
-              <a:t>9/3/2026</a:t>
+              <a:t>9/5/2026</a:t>
             </a:fld>
             <a:endParaRPr lang="en-US" dirty="0"/>
           </a:p>
@@ -9078,7 +9078,7 @@
             <a:fld id="{B61BEF0D-F0BB-DE4B-95CE-6DB70DBA9567}" type="datetimeFigureOut">
               <a:rPr lang="en-US" smtClean="0"/>
               <a:pPr/>
-              <a:t>9/3/2026</a:t>
+              <a:t>9/5/2026</a:t>
             </a:fld>
             <a:endParaRPr lang="en-US" dirty="0"/>
           </a:p>
@@ -9289,7 +9289,7 @@
                 </a:solidFill>
               </a:rPr>
               <a:pPr/>
-              <a:t>9/3/2026</a:t>
+              <a:t>9/5/2026</a:t>
             </a:fld>
             <a:endParaRPr lang="en-US" sz="1100" dirty="0">
               <a:solidFill>
@@ -10026,52 +10026,6 @@
       </p:grpSpPr>
       <p:sp>
         <p:nvSpPr>
-          <p:cNvPr id="2" name="Text Placeholder 1">
-            <a:extLst>
-              <a:ext uri="{FF2B5EF4-FFF2-40B4-BE49-F238E27FC236}">
-                <a16:creationId xmlns:a16="http://schemas.microsoft.com/office/drawing/2014/main" id="{7201737A-B873-4D1D-8A41-5ABF5184BC8F}"/>
-              </a:ext>
-            </a:extLst>
-          </p:cNvPr>
-          <p:cNvSpPr>
-            <a:spLocks noGrp="1"/>
-          </p:cNvSpPr>
-          <p:nvPr>
-            <p:ph type="body" sz="quarter" idx="11"/>
-          </p:nvPr>
-        </p:nvSpPr>
-        <p:spPr>
-          <a:xfrm>
-            <a:off x="-223157" y="3583914"/>
-            <a:ext cx="3400089" cy="861497"/>
-          </a:xfrm>
-        </p:spPr>
-        <p:txBody>
-          <a:bodyPr vert="horz" lIns="91440" tIns="45720" rIns="91440" bIns="45720" rtlCol="0" anchor="t">
-            <a:normAutofit/>
-          </a:bodyPr>
-          <a:lstStyle/>
-          <a:p>
-            <a:pPr algn="r"/>
-            <a:r>
-              <a:rPr sz="1800" b="0"/>
-              <a:t>Mrunal Kanade</a:t>
-            </a:r>
-            <a:br/>
-            <a:r>
-              <a:rPr sz="1800" b="0"/>
-              <a:t>College Name: [Add college name]</a:t>
-            </a:r>
-            <a:endParaRPr lang="en-IN" b="0" dirty="0">
-              <a:solidFill>
-                <a:schemeClr val="tx1"/>
-              </a:solidFill>
-            </a:endParaRPr>
-          </a:p>
-        </p:txBody>
-      </p:sp>
-      <p:sp>
-        <p:nvSpPr>
           <p:cNvPr id="4" name="Title 3">
             <a:extLst>
               <a:ext uri="{FF2B5EF4-FFF2-40B4-BE49-F238E27FC236}">
@@ -10094,7 +10048,7 @@
         </p:spPr>
         <p:txBody>
           <a:bodyPr>
-            <a:normAutofit/>
+            <a:normAutofit fontScale="90000"/>
           </a:bodyPr>
           <a:lstStyle/>
           <a:p>
@@ -10410,8 +10364,8 @@
         </p:nvSpPr>
         <p:spPr>
           <a:xfrm>
-            <a:off x="957406" y="4576469"/>
-            <a:ext cx="3176362" cy="646331"/>
+            <a:off x="606392" y="4577423"/>
+            <a:ext cx="4625247" cy="323165"/>
           </a:xfrm>
           <a:prstGeom prst="rect">
             <a:avLst/>
@@ -10425,9 +10379,59 @@
           <a:lstStyle/>
           <a:p>
             <a:r>
-              <a:rPr sz="1500" b="1"/>
-              <a:t>AICTE STU ID : [Add ID from offer letter]</a:t>
-            </a:r>
+              <a:rPr sz="1500" b="1" dirty="0"/>
+              <a:t>AICTE STU ID :</a:t>
+            </a:r>
+            <a:r>
+              <a:rPr lang="en-IN" sz="1500" b="1" dirty="0"/>
+              <a:t>STU682b3f7e428531747664766</a:t>
+            </a:r>
+            <a:endParaRPr sz="1500" b="1" dirty="0"/>
+          </a:p>
+        </p:txBody>
+      </p:sp>
+      <p:sp>
+        <p:nvSpPr>
+          <p:cNvPr id="5" name="TextBox 4">
+            <a:extLst>
+              <a:ext uri="{FF2B5EF4-FFF2-40B4-BE49-F238E27FC236}">
+                <a16:creationId xmlns:a16="http://schemas.microsoft.com/office/drawing/2014/main" id="{4410C3A7-EC1F-39B3-5B32-2565469A102B}"/>
+              </a:ext>
+            </a:extLst>
+          </p:cNvPr>
+          <p:cNvSpPr txBox="1"/>
+          <p:nvPr/>
+        </p:nvSpPr>
+        <p:spPr>
+          <a:xfrm>
+            <a:off x="606392" y="3782728"/>
+            <a:ext cx="9615637" cy="923330"/>
+          </a:xfrm>
+          <a:prstGeom prst="rect">
+            <a:avLst/>
+          </a:prstGeom>
+          <a:noFill/>
+        </p:spPr>
+        <p:txBody>
+          <a:bodyPr wrap="square" rtlCol="0">
+            <a:spAutoFit/>
+          </a:bodyPr>
+          <a:lstStyle/>
+          <a:p>
+            <a:r>
+              <a:rPr lang="en-US" dirty="0"/>
+              <a:t>Name : Mrunal Kanade           </a:t>
+            </a:r>
+            <a:br>
+              <a:rPr lang="en-US" dirty="0"/>
+            </a:br>
+            <a:r>
+              <a:rPr lang="en-US" dirty="0"/>
+              <a:t>College Name: Modern Education Society’s Wadia College of Engineering, Pune</a:t>
+            </a:r>
+          </a:p>
+          <a:p>
+            <a:endParaRPr lang="en-IN" dirty="0"/>
           </a:p>
         </p:txBody>
       </p:sp>
@@ -10849,128 +10853,6 @@
                       </p:childTnLst>
                     </p:cTn>
                   </p:par>
-                  <p:par>
-                    <p:cTn id="28" fill="hold">
-                      <p:stCondLst>
-                        <p:cond delay="indefinite"/>
-                      </p:stCondLst>
-                      <p:childTnLst>
-                        <p:par>
-                          <p:cTn id="29" fill="hold">
-                            <p:stCondLst>
-                              <p:cond delay="0"/>
-                            </p:stCondLst>
-                            <p:childTnLst>
-                              <p:par>
-                                <p:cTn id="30" presetID="14" presetClass="entr" presetSubtype="10" fill="hold" grpId="0" nodeType="clickEffect">
-                                  <p:stCondLst>
-                                    <p:cond delay="0"/>
-                                  </p:stCondLst>
-                                  <p:childTnLst>
-                                    <p:set>
-                                      <p:cBhvr>
-                                        <p:cTn id="31" dur="1" fill="hold">
-                                          <p:stCondLst>
-                                            <p:cond delay="0"/>
-                                          </p:stCondLst>
-                                        </p:cTn>
-                                        <p:tgtEl>
-                                          <p:spTgt spid="2">
-                                            <p:txEl>
-                                              <p:pRg st="0" end="0"/>
-                                            </p:txEl>
-                                          </p:spTgt>
-                                        </p:tgtEl>
-                                        <p:attrNameLst>
-                                          <p:attrName>style.visibility</p:attrName>
-                                        </p:attrNameLst>
-                                      </p:cBhvr>
-                                      <p:to>
-                                        <p:strVal val="visible"/>
-                                      </p:to>
-                                    </p:set>
-                                    <p:animEffect transition="in" filter="randombar(horizontal)">
-                                      <p:cBhvr>
-                                        <p:cTn id="32" dur="500"/>
-                                        <p:tgtEl>
-                                          <p:spTgt spid="2">
-                                            <p:txEl>
-                                              <p:pRg st="0" end="0"/>
-                                            </p:txEl>
-                                          </p:spTgt>
-                                        </p:tgtEl>
-                                      </p:cBhvr>
-                                    </p:animEffect>
-                                  </p:childTnLst>
-                                </p:cTn>
-                              </p:par>
-                            </p:childTnLst>
-                          </p:cTn>
-                        </p:par>
-                      </p:childTnLst>
-                    </p:cTn>
-                  </p:par>
-                  <p:par>
-                    <p:cTn id="33" fill="hold">
-                      <p:stCondLst>
-                        <p:cond delay="indefinite"/>
-                      </p:stCondLst>
-                      <p:childTnLst>
-                        <p:par>
-                          <p:cTn id="34" fill="hold">
-                            <p:stCondLst>
-                              <p:cond delay="0"/>
-                            </p:stCondLst>
-                            <p:childTnLst>
-                              <p:par>
-                                <p:cTn id="35" presetID="14" presetClass="entr" presetSubtype="10" fill="hold" grpId="0" nodeType="clickEffect">
-                                  <p:stCondLst>
-                                    <p:cond delay="0"/>
-                                  </p:stCondLst>
-                                  <p:childTnLst>
-                                    <p:set>
-                                      <p:cBhvr>
-                                        <p:cTn id="36" dur="1" fill="hold">
-                                          <p:stCondLst>
-                                            <p:cond delay="0"/>
-                                          </p:stCondLst>
-                                        </p:cTn>
-                                        <p:tgtEl>
-                                          <p:spTgt spid="2">
-                                            <p:txEl>
-                                              <p:pRg st="1" end="1"/>
-                                            </p:txEl>
-                                          </p:spTgt>
-                                        </p:tgtEl>
-                                        <p:attrNameLst>
-                                          <p:attrName>style.visibility</p:attrName>
-                                        </p:attrNameLst>
-                                      </p:cBhvr>
-                                      <p:to>
-                                        <p:strVal val="visible"/>
-                                      </p:to>
-                                    </p:set>
-                                    <p:animEffect transition="in" filter="randombar(horizontal)">
-                                      <p:cBhvr>
-                                        <p:cTn id="37" dur="500"/>
-                                        <p:tgtEl>
-                                          <p:spTgt spid="2">
-                                            <p:txEl>
-                                              <p:pRg st="1" end="1"/>
-                                            </p:txEl>
-                                          </p:spTgt>
-                                        </p:tgtEl>
-                                      </p:cBhvr>
-                                    </p:animEffect>
-                                  </p:childTnLst>
-                                </p:cTn>
-                              </p:par>
-                            </p:childTnLst>
-                          </p:cTn>
-                        </p:par>
-                      </p:childTnLst>
-                    </p:cTn>
-                  </p:par>
                 </p:childTnLst>
               </p:cTn>
               <p:prevCondLst>
@@ -10993,7 +10875,6 @@
       </p:par>
     </p:tnLst>
     <p:bldLst>
-      <p:bldP spid="2" grpId="0" build="p"/>
       <p:bldP spid="4" grpId="0"/>
       <p:bldP spid="15" grpId="0"/>
     </p:bldLst>
@@ -11234,464 +11115,6 @@
   <p:clrMapOvr>
     <a:masterClrMapping/>
   </p:clrMapOvr>
-  <p:timing>
-    <p:tnLst>
-      <p:par>
-        <p:cTn id="1" dur="indefinite" restart="never" nodeType="tmRoot">
-          <p:childTnLst>
-            <p:seq concurrent="1" nextAc="seek">
-              <p:cTn id="2" dur="indefinite" nodeType="mainSeq">
-                <p:childTnLst>
-                  <p:par>
-                    <p:cTn id="3" fill="hold">
-                      <p:stCondLst>
-                        <p:cond delay="indefinite"/>
-                      </p:stCondLst>
-                      <p:childTnLst>
-                        <p:par>
-                          <p:cTn id="4" fill="hold">
-                            <p:stCondLst>
-                              <p:cond delay="0"/>
-                            </p:stCondLst>
-                            <p:childTnLst>
-                              <p:par>
-                                <p:cTn id="5" presetID="53" presetClass="entr" presetSubtype="16" fill="hold" grpId="0" nodeType="clickEffect">
-                                  <p:stCondLst>
-                                    <p:cond delay="0"/>
-                                  </p:stCondLst>
-                                  <p:childTnLst>
-                                    <p:set>
-                                      <p:cBhvr>
-                                        <p:cTn id="6" dur="1" fill="hold">
-                                          <p:stCondLst>
-                                            <p:cond delay="0"/>
-                                          </p:stCondLst>
-                                        </p:cTn>
-                                        <p:tgtEl>
-                                          <p:spTgt spid="4"/>
-                                        </p:tgtEl>
-                                        <p:attrNameLst>
-                                          <p:attrName>style.visibility</p:attrName>
-                                        </p:attrNameLst>
-                                      </p:cBhvr>
-                                      <p:to>
-                                        <p:strVal val="visible"/>
-                                      </p:to>
-                                    </p:set>
-                                    <p:anim calcmode="lin" valueType="num">
-                                      <p:cBhvr>
-                                        <p:cTn id="7" dur="500" fill="hold"/>
-                                        <p:tgtEl>
-                                          <p:spTgt spid="4"/>
-                                        </p:tgtEl>
-                                        <p:attrNameLst>
-                                          <p:attrName>ppt_w</p:attrName>
-                                        </p:attrNameLst>
-                                      </p:cBhvr>
-                                      <p:tavLst>
-                                        <p:tav tm="0">
-                                          <p:val>
-                                            <p:fltVal val="0"/>
-                                          </p:val>
-                                        </p:tav>
-                                        <p:tav tm="100000">
-                                          <p:val>
-                                            <p:strVal val="#ppt_w"/>
-                                          </p:val>
-                                        </p:tav>
-                                      </p:tavLst>
-                                    </p:anim>
-                                    <p:anim calcmode="lin" valueType="num">
-                                      <p:cBhvr>
-                                        <p:cTn id="8" dur="500" fill="hold"/>
-                                        <p:tgtEl>
-                                          <p:spTgt spid="4"/>
-                                        </p:tgtEl>
-                                        <p:attrNameLst>
-                                          <p:attrName>ppt_h</p:attrName>
-                                        </p:attrNameLst>
-                                      </p:cBhvr>
-                                      <p:tavLst>
-                                        <p:tav tm="0">
-                                          <p:val>
-                                            <p:fltVal val="0"/>
-                                          </p:val>
-                                        </p:tav>
-                                        <p:tav tm="100000">
-                                          <p:val>
-                                            <p:strVal val="#ppt_h"/>
-                                          </p:val>
-                                        </p:tav>
-                                      </p:tavLst>
-                                    </p:anim>
-                                    <p:animEffect transition="in" filter="fade">
-                                      <p:cBhvr>
-                                        <p:cTn id="9" dur="500"/>
-                                        <p:tgtEl>
-                                          <p:spTgt spid="4"/>
-                                        </p:tgtEl>
-                                      </p:cBhvr>
-                                    </p:animEffect>
-                                  </p:childTnLst>
-                                </p:cTn>
-                              </p:par>
-                            </p:childTnLst>
-                          </p:cTn>
-                        </p:par>
-                      </p:childTnLst>
-                    </p:cTn>
-                  </p:par>
-                  <p:par>
-                    <p:cTn id="10" fill="hold">
-                      <p:stCondLst>
-                        <p:cond delay="indefinite"/>
-                      </p:stCondLst>
-                      <p:childTnLst>
-                        <p:par>
-                          <p:cTn id="11" fill="hold">
-                            <p:stCondLst>
-                              <p:cond delay="0"/>
-                            </p:stCondLst>
-                            <p:childTnLst>
-                              <p:par>
-                                <p:cTn id="12" presetID="42" presetClass="entr" presetSubtype="0" fill="hold" grpId="0" nodeType="clickEffect" nodePh="1">
-                                  <p:stCondLst>
-                                    <p:cond delay="0"/>
-                                  </p:stCondLst>
-                                  <p:endCondLst>
-                                    <p:cond evt="begin" delay="0">
-                                      <p:tn val="12"/>
-                                    </p:cond>
-                                  </p:endCondLst>
-                                  <p:childTnLst>
-                                    <p:set>
-                                      <p:cBhvr>
-                                        <p:cTn id="13" dur="1" fill="hold">
-                                          <p:stCondLst>
-                                            <p:cond delay="0"/>
-                                          </p:stCondLst>
-                                        </p:cTn>
-                                        <p:tgtEl>
-                                          <p:spTgt spid="7"/>
-                                        </p:tgtEl>
-                                        <p:attrNameLst>
-                                          <p:attrName>style.visibility</p:attrName>
-                                        </p:attrNameLst>
-                                      </p:cBhvr>
-                                      <p:to>
-                                        <p:strVal val="visible"/>
-                                      </p:to>
-                                    </p:set>
-                                    <p:animEffect transition="in" filter="fade">
-                                      <p:cBhvr>
-                                        <p:cTn id="14" dur="1000"/>
-                                        <p:tgtEl>
-                                          <p:spTgt spid="7"/>
-                                        </p:tgtEl>
-                                      </p:cBhvr>
-                                    </p:animEffect>
-                                    <p:anim calcmode="lin" valueType="num">
-                                      <p:cBhvr>
-                                        <p:cTn id="15" dur="1000" fill="hold"/>
-                                        <p:tgtEl>
-                                          <p:spTgt spid="7"/>
-                                        </p:tgtEl>
-                                        <p:attrNameLst>
-                                          <p:attrName>ppt_x</p:attrName>
-                                        </p:attrNameLst>
-                                      </p:cBhvr>
-                                      <p:tavLst>
-                                        <p:tav tm="0">
-                                          <p:val>
-                                            <p:strVal val="#ppt_x"/>
-                                          </p:val>
-                                        </p:tav>
-                                        <p:tav tm="100000">
-                                          <p:val>
-                                            <p:strVal val="#ppt_x"/>
-                                          </p:val>
-                                        </p:tav>
-                                      </p:tavLst>
-                                    </p:anim>
-                                    <p:anim calcmode="lin" valueType="num">
-                                      <p:cBhvr>
-                                        <p:cTn id="16" dur="1000" fill="hold"/>
-                                        <p:tgtEl>
-                                          <p:spTgt spid="7"/>
-                                        </p:tgtEl>
-                                        <p:attrNameLst>
-                                          <p:attrName>ppt_y</p:attrName>
-                                        </p:attrNameLst>
-                                      </p:cBhvr>
-                                      <p:tavLst>
-                                        <p:tav tm="0">
-                                          <p:val>
-                                            <p:strVal val="#ppt_y+.1"/>
-                                          </p:val>
-                                        </p:tav>
-                                        <p:tav tm="100000">
-                                          <p:val>
-                                            <p:strVal val="#ppt_y"/>
-                                          </p:val>
-                                        </p:tav>
-                                      </p:tavLst>
-                                    </p:anim>
-                                  </p:childTnLst>
-                                </p:cTn>
-                              </p:par>
-                            </p:childTnLst>
-                          </p:cTn>
-                        </p:par>
-                      </p:childTnLst>
-                    </p:cTn>
-                  </p:par>
-                  <p:par>
-                    <p:cTn id="17" fill="hold">
-                      <p:stCondLst>
-                        <p:cond delay="indefinite"/>
-                      </p:stCondLst>
-                      <p:childTnLst>
-                        <p:par>
-                          <p:cTn id="18" fill="hold">
-                            <p:stCondLst>
-                              <p:cond delay="0"/>
-                            </p:stCondLst>
-                            <p:childTnLst>
-                              <p:par>
-                                <p:cTn id="19" presetID="42" presetClass="entr" presetSubtype="0" fill="hold" grpId="0" nodeType="clickEffect" nodePh="1">
-                                  <p:stCondLst>
-                                    <p:cond delay="0"/>
-                                  </p:stCondLst>
-                                  <p:endCondLst>
-                                    <p:cond evt="begin" delay="0">
-                                      <p:tn val="19"/>
-                                    </p:cond>
-                                  </p:endCondLst>
-                                  <p:childTnLst>
-                                    <p:set>
-                                      <p:cBhvr>
-                                        <p:cTn id="20" dur="1" fill="hold">
-                                          <p:stCondLst>
-                                            <p:cond delay="0"/>
-                                          </p:stCondLst>
-                                        </p:cTn>
-                                        <p:tgtEl>
-                                          <p:spTgt spid="8"/>
-                                        </p:tgtEl>
-                                        <p:attrNameLst>
-                                          <p:attrName>style.visibility</p:attrName>
-                                        </p:attrNameLst>
-                                      </p:cBhvr>
-                                      <p:to>
-                                        <p:strVal val="visible"/>
-                                      </p:to>
-                                    </p:set>
-                                    <p:animEffect transition="in" filter="fade">
-                                      <p:cBhvr>
-                                        <p:cTn id="21" dur="1000"/>
-                                        <p:tgtEl>
-                                          <p:spTgt spid="8"/>
-                                        </p:tgtEl>
-                                      </p:cBhvr>
-                                    </p:animEffect>
-                                    <p:anim calcmode="lin" valueType="num">
-                                      <p:cBhvr>
-                                        <p:cTn id="22" dur="1000" fill="hold"/>
-                                        <p:tgtEl>
-                                          <p:spTgt spid="8"/>
-                                        </p:tgtEl>
-                                        <p:attrNameLst>
-                                          <p:attrName>ppt_x</p:attrName>
-                                        </p:attrNameLst>
-                                      </p:cBhvr>
-                                      <p:tavLst>
-                                        <p:tav tm="0">
-                                          <p:val>
-                                            <p:strVal val="#ppt_x"/>
-                                          </p:val>
-                                        </p:tav>
-                                        <p:tav tm="100000">
-                                          <p:val>
-                                            <p:strVal val="#ppt_x"/>
-                                          </p:val>
-                                        </p:tav>
-                                      </p:tavLst>
-                                    </p:anim>
-                                    <p:anim calcmode="lin" valueType="num">
-                                      <p:cBhvr>
-                                        <p:cTn id="23" dur="1000" fill="hold"/>
-                                        <p:tgtEl>
-                                          <p:spTgt spid="8"/>
-                                        </p:tgtEl>
-                                        <p:attrNameLst>
-                                          <p:attrName>ppt_y</p:attrName>
-                                        </p:attrNameLst>
-                                      </p:cBhvr>
-                                      <p:tavLst>
-                                        <p:tav tm="0">
-                                          <p:val>
-                                            <p:strVal val="#ppt_y+.1"/>
-                                          </p:val>
-                                        </p:tav>
-                                        <p:tav tm="100000">
-                                          <p:val>
-                                            <p:strVal val="#ppt_y"/>
-                                          </p:val>
-                                        </p:tav>
-                                      </p:tavLst>
-                                    </p:anim>
-                                  </p:childTnLst>
-                                </p:cTn>
-                              </p:par>
-                            </p:childTnLst>
-                          </p:cTn>
-                        </p:par>
-                      </p:childTnLst>
-                    </p:cTn>
-                  </p:par>
-                  <p:par>
-                    <p:cTn id="24" fill="hold">
-                      <p:stCondLst>
-                        <p:cond delay="indefinite"/>
-                      </p:stCondLst>
-                      <p:childTnLst>
-                        <p:par>
-                          <p:cTn id="25" fill="hold">
-                            <p:stCondLst>
-                              <p:cond delay="0"/>
-                            </p:stCondLst>
-                            <p:childTnLst>
-                              <p:par>
-                                <p:cTn id="26" presetID="42" presetClass="entr" presetSubtype="0" fill="hold" grpId="0" nodeType="clickEffect">
-                                  <p:stCondLst>
-                                    <p:cond delay="0"/>
-                                  </p:stCondLst>
-                                  <p:childTnLst>
-                                    <p:set>
-                                      <p:cBhvr>
-                                        <p:cTn id="27" dur="1" fill="hold">
-                                          <p:stCondLst>
-                                            <p:cond delay="0"/>
-                                          </p:stCondLst>
-                                        </p:cTn>
-                                        <p:tgtEl>
-                                          <p:spTgt spid="10">
-                                            <p:txEl>
-                                              <p:pRg st="0" end="0"/>
-                                            </p:txEl>
-                                          </p:spTgt>
-                                        </p:tgtEl>
-                                        <p:attrNameLst>
-                                          <p:attrName>style.visibility</p:attrName>
-                                        </p:attrNameLst>
-                                      </p:cBhvr>
-                                      <p:to>
-                                        <p:strVal val="visible"/>
-                                      </p:to>
-                                    </p:set>
-                                    <p:animEffect transition="in" filter="fade">
-                                      <p:cBhvr>
-                                        <p:cTn id="28" dur="1000"/>
-                                        <p:tgtEl>
-                                          <p:spTgt spid="10">
-                                            <p:txEl>
-                                              <p:pRg st="0" end="0"/>
-                                            </p:txEl>
-                                          </p:spTgt>
-                                        </p:tgtEl>
-                                      </p:cBhvr>
-                                    </p:animEffect>
-                                    <p:anim calcmode="lin" valueType="num">
-                                      <p:cBhvr>
-                                        <p:cTn id="29" dur="1000" fill="hold"/>
-                                        <p:tgtEl>
-                                          <p:spTgt spid="10">
-                                            <p:txEl>
-                                              <p:pRg st="0" end="0"/>
-                                            </p:txEl>
-                                          </p:spTgt>
-                                        </p:tgtEl>
-                                        <p:attrNameLst>
-                                          <p:attrName>ppt_x</p:attrName>
-                                        </p:attrNameLst>
-                                      </p:cBhvr>
-                                      <p:tavLst>
-                                        <p:tav tm="0">
-                                          <p:val>
-                                            <p:strVal val="#ppt_x"/>
-                                          </p:val>
-                                        </p:tav>
-                                        <p:tav tm="100000">
-                                          <p:val>
-                                            <p:strVal val="#ppt_x"/>
-                                          </p:val>
-                                        </p:tav>
-                                      </p:tavLst>
-                                    </p:anim>
-                                    <p:anim calcmode="lin" valueType="num">
-                                      <p:cBhvr>
-                                        <p:cTn id="30" dur="1000" fill="hold"/>
-                                        <p:tgtEl>
-                                          <p:spTgt spid="10">
-                                            <p:txEl>
-                                              <p:pRg st="0" end="0"/>
-                                            </p:txEl>
-                                          </p:spTgt>
-                                        </p:tgtEl>
-                                        <p:attrNameLst>
-                                          <p:attrName>ppt_y</p:attrName>
-                                        </p:attrNameLst>
-                                      </p:cBhvr>
-                                      <p:tavLst>
-                                        <p:tav tm="0">
-                                          <p:val>
-                                            <p:strVal val="#ppt_y+.1"/>
-                                          </p:val>
-                                        </p:tav>
-                                        <p:tav tm="100000">
-                                          <p:val>
-                                            <p:strVal val="#ppt_y"/>
-                                          </p:val>
-                                        </p:tav>
-                                      </p:tavLst>
-                                    </p:anim>
-                                  </p:childTnLst>
-                                </p:cTn>
-                              </p:par>
-                            </p:childTnLst>
-                          </p:cTn>
-                        </p:par>
-                      </p:childTnLst>
-                    </p:cTn>
-                  </p:par>
-                </p:childTnLst>
-              </p:cTn>
-              <p:prevCondLst>
-                <p:cond evt="onPrev" delay="0">
-                  <p:tgtEl>
-                    <p:sldTgt/>
-                  </p:tgtEl>
-                </p:cond>
-              </p:prevCondLst>
-              <p:nextCondLst>
-                <p:cond evt="onNext" delay="0">
-                  <p:tgtEl>
-                    <p:sldTgt/>
-                  </p:tgtEl>
-                </p:cond>
-              </p:nextCondLst>
-            </p:seq>
-          </p:childTnLst>
-        </p:cTn>
-      </p:par>
-    </p:tnLst>
-    <p:bldLst>
-      <p:bldP spid="4" grpId="0"/>
-      <p:bldP spid="7" grpId="0"/>
-      <p:bldP spid="8" grpId="0"/>
-      <p:bldP spid="10" grpId="0" build="p"/>
-    </p:bldLst>
-  </p:timing>
 </p:sld>
 </file>
 
@@ -11911,348 +11334,6 @@
   <p:clrMapOvr>
     <a:masterClrMapping/>
   </p:clrMapOvr>
-  <p:timing>
-    <p:tnLst>
-      <p:par>
-        <p:cTn id="1" dur="indefinite" restart="never" nodeType="tmRoot">
-          <p:childTnLst>
-            <p:seq concurrent="1" nextAc="seek">
-              <p:cTn id="2" dur="indefinite" nodeType="mainSeq">
-                <p:childTnLst>
-                  <p:par>
-                    <p:cTn id="3" fill="hold">
-                      <p:stCondLst>
-                        <p:cond delay="indefinite"/>
-                      </p:stCondLst>
-                      <p:childTnLst>
-                        <p:par>
-                          <p:cTn id="4" fill="hold">
-                            <p:stCondLst>
-                              <p:cond delay="0"/>
-                            </p:stCondLst>
-                            <p:childTnLst>
-                              <p:par>
-                                <p:cTn id="5" presetID="53" presetClass="entr" presetSubtype="16" fill="hold" grpId="0" nodeType="clickEffect">
-                                  <p:stCondLst>
-                                    <p:cond delay="0"/>
-                                  </p:stCondLst>
-                                  <p:childTnLst>
-                                    <p:set>
-                                      <p:cBhvr>
-                                        <p:cTn id="6" dur="1" fill="hold">
-                                          <p:stCondLst>
-                                            <p:cond delay="0"/>
-                                          </p:stCondLst>
-                                        </p:cTn>
-                                        <p:tgtEl>
-                                          <p:spTgt spid="4"/>
-                                        </p:tgtEl>
-                                        <p:attrNameLst>
-                                          <p:attrName>style.visibility</p:attrName>
-                                        </p:attrNameLst>
-                                      </p:cBhvr>
-                                      <p:to>
-                                        <p:strVal val="visible"/>
-                                      </p:to>
-                                    </p:set>
-                                    <p:anim calcmode="lin" valueType="num">
-                                      <p:cBhvr>
-                                        <p:cTn id="7" dur="500" fill="hold"/>
-                                        <p:tgtEl>
-                                          <p:spTgt spid="4"/>
-                                        </p:tgtEl>
-                                        <p:attrNameLst>
-                                          <p:attrName>ppt_w</p:attrName>
-                                        </p:attrNameLst>
-                                      </p:cBhvr>
-                                      <p:tavLst>
-                                        <p:tav tm="0">
-                                          <p:val>
-                                            <p:fltVal val="0"/>
-                                          </p:val>
-                                        </p:tav>
-                                        <p:tav tm="100000">
-                                          <p:val>
-                                            <p:strVal val="#ppt_w"/>
-                                          </p:val>
-                                        </p:tav>
-                                      </p:tavLst>
-                                    </p:anim>
-                                    <p:anim calcmode="lin" valueType="num">
-                                      <p:cBhvr>
-                                        <p:cTn id="8" dur="500" fill="hold"/>
-                                        <p:tgtEl>
-                                          <p:spTgt spid="4"/>
-                                        </p:tgtEl>
-                                        <p:attrNameLst>
-                                          <p:attrName>ppt_h</p:attrName>
-                                        </p:attrNameLst>
-                                      </p:cBhvr>
-                                      <p:tavLst>
-                                        <p:tav tm="0">
-                                          <p:val>
-                                            <p:fltVal val="0"/>
-                                          </p:val>
-                                        </p:tav>
-                                        <p:tav tm="100000">
-                                          <p:val>
-                                            <p:strVal val="#ppt_h"/>
-                                          </p:val>
-                                        </p:tav>
-                                      </p:tavLst>
-                                    </p:anim>
-                                    <p:animEffect transition="in" filter="fade">
-                                      <p:cBhvr>
-                                        <p:cTn id="9" dur="500"/>
-                                        <p:tgtEl>
-                                          <p:spTgt spid="4"/>
-                                        </p:tgtEl>
-                                      </p:cBhvr>
-                                    </p:animEffect>
-                                  </p:childTnLst>
-                                </p:cTn>
-                              </p:par>
-                            </p:childTnLst>
-                          </p:cTn>
-                        </p:par>
-                      </p:childTnLst>
-                    </p:cTn>
-                  </p:par>
-                  <p:par>
-                    <p:cTn id="10" fill="hold">
-                      <p:stCondLst>
-                        <p:cond delay="indefinite"/>
-                      </p:stCondLst>
-                      <p:childTnLst>
-                        <p:par>
-                          <p:cTn id="11" fill="hold">
-                            <p:stCondLst>
-                              <p:cond delay="0"/>
-                            </p:stCondLst>
-                            <p:childTnLst>
-                              <p:par>
-                                <p:cTn id="12" presetID="42" presetClass="entr" presetSubtype="0" fill="hold" grpId="0" nodeType="clickEffect" nodePh="1">
-                                  <p:stCondLst>
-                                    <p:cond delay="0"/>
-                                  </p:stCondLst>
-                                  <p:endCondLst>
-                                    <p:cond evt="begin" delay="0">
-                                      <p:tn val="12"/>
-                                    </p:cond>
-                                  </p:endCondLst>
-                                  <p:childTnLst>
-                                    <p:set>
-                                      <p:cBhvr>
-                                        <p:cTn id="13" dur="1" fill="hold">
-                                          <p:stCondLst>
-                                            <p:cond delay="0"/>
-                                          </p:stCondLst>
-                                        </p:cTn>
-                                        <p:tgtEl>
-                                          <p:spTgt spid="7"/>
-                                        </p:tgtEl>
-                                        <p:attrNameLst>
-                                          <p:attrName>style.visibility</p:attrName>
-                                        </p:attrNameLst>
-                                      </p:cBhvr>
-                                      <p:to>
-                                        <p:strVal val="visible"/>
-                                      </p:to>
-                                    </p:set>
-                                    <p:animEffect transition="in" filter="fade">
-                                      <p:cBhvr>
-                                        <p:cTn id="14" dur="1000"/>
-                                        <p:tgtEl>
-                                          <p:spTgt spid="7"/>
-                                        </p:tgtEl>
-                                      </p:cBhvr>
-                                    </p:animEffect>
-                                    <p:anim calcmode="lin" valueType="num">
-                                      <p:cBhvr>
-                                        <p:cTn id="15" dur="1000" fill="hold"/>
-                                        <p:tgtEl>
-                                          <p:spTgt spid="7"/>
-                                        </p:tgtEl>
-                                        <p:attrNameLst>
-                                          <p:attrName>ppt_x</p:attrName>
-                                        </p:attrNameLst>
-                                      </p:cBhvr>
-                                      <p:tavLst>
-                                        <p:tav tm="0">
-                                          <p:val>
-                                            <p:strVal val="#ppt_x"/>
-                                          </p:val>
-                                        </p:tav>
-                                        <p:tav tm="100000">
-                                          <p:val>
-                                            <p:strVal val="#ppt_x"/>
-                                          </p:val>
-                                        </p:tav>
-                                      </p:tavLst>
-                                    </p:anim>
-                                    <p:anim calcmode="lin" valueType="num">
-                                      <p:cBhvr>
-                                        <p:cTn id="16" dur="1000" fill="hold"/>
-                                        <p:tgtEl>
-                                          <p:spTgt spid="7"/>
-                                        </p:tgtEl>
-                                        <p:attrNameLst>
-                                          <p:attrName>ppt_y</p:attrName>
-                                        </p:attrNameLst>
-                                      </p:cBhvr>
-                                      <p:tavLst>
-                                        <p:tav tm="0">
-                                          <p:val>
-                                            <p:strVal val="#ppt_y+.1"/>
-                                          </p:val>
-                                        </p:tav>
-                                        <p:tav tm="100000">
-                                          <p:val>
-                                            <p:strVal val="#ppt_y"/>
-                                          </p:val>
-                                        </p:tav>
-                                      </p:tavLst>
-                                    </p:anim>
-                                  </p:childTnLst>
-                                </p:cTn>
-                              </p:par>
-                            </p:childTnLst>
-                          </p:cTn>
-                        </p:par>
-                      </p:childTnLst>
-                    </p:cTn>
-                  </p:par>
-                  <p:par>
-                    <p:cTn id="17" fill="hold">
-                      <p:stCondLst>
-                        <p:cond delay="indefinite"/>
-                      </p:stCondLst>
-                      <p:childTnLst>
-                        <p:par>
-                          <p:cTn id="18" fill="hold">
-                            <p:stCondLst>
-                              <p:cond delay="0"/>
-                            </p:stCondLst>
-                            <p:childTnLst>
-                              <p:par>
-                                <p:cTn id="19" presetID="42" presetClass="entr" presetSubtype="0" fill="hold" grpId="0" nodeType="clickEffect" nodePh="1">
-                                  <p:stCondLst>
-                                    <p:cond delay="0"/>
-                                  </p:stCondLst>
-                                  <p:endCondLst>
-                                    <p:cond evt="begin" delay="0">
-                                      <p:tn val="19"/>
-                                    </p:cond>
-                                  </p:endCondLst>
-                                  <p:childTnLst>
-                                    <p:set>
-                                      <p:cBhvr>
-                                        <p:cTn id="20" dur="1" fill="hold">
-                                          <p:stCondLst>
-                                            <p:cond delay="0"/>
-                                          </p:stCondLst>
-                                        </p:cTn>
-                                        <p:tgtEl>
-                                          <p:spTgt spid="8"/>
-                                        </p:tgtEl>
-                                        <p:attrNameLst>
-                                          <p:attrName>style.visibility</p:attrName>
-                                        </p:attrNameLst>
-                                      </p:cBhvr>
-                                      <p:to>
-                                        <p:strVal val="visible"/>
-                                      </p:to>
-                                    </p:set>
-                                    <p:animEffect transition="in" filter="fade">
-                                      <p:cBhvr>
-                                        <p:cTn id="21" dur="1000"/>
-                                        <p:tgtEl>
-                                          <p:spTgt spid="8"/>
-                                        </p:tgtEl>
-                                      </p:cBhvr>
-                                    </p:animEffect>
-                                    <p:anim calcmode="lin" valueType="num">
-                                      <p:cBhvr>
-                                        <p:cTn id="22" dur="1000" fill="hold"/>
-                                        <p:tgtEl>
-                                          <p:spTgt spid="8"/>
-                                        </p:tgtEl>
-                                        <p:attrNameLst>
-                                          <p:attrName>ppt_x</p:attrName>
-                                        </p:attrNameLst>
-                                      </p:cBhvr>
-                                      <p:tavLst>
-                                        <p:tav tm="0">
-                                          <p:val>
-                                            <p:strVal val="#ppt_x"/>
-                                          </p:val>
-                                        </p:tav>
-                                        <p:tav tm="100000">
-                                          <p:val>
-                                            <p:strVal val="#ppt_x"/>
-                                          </p:val>
-                                        </p:tav>
-                                      </p:tavLst>
-                                    </p:anim>
-                                    <p:anim calcmode="lin" valueType="num">
-                                      <p:cBhvr>
-                                        <p:cTn id="23" dur="1000" fill="hold"/>
-                                        <p:tgtEl>
-                                          <p:spTgt spid="8"/>
-                                        </p:tgtEl>
-                                        <p:attrNameLst>
-                                          <p:attrName>ppt_y</p:attrName>
-                                        </p:attrNameLst>
-                                      </p:cBhvr>
-                                      <p:tavLst>
-                                        <p:tav tm="0">
-                                          <p:val>
-                                            <p:strVal val="#ppt_y+.1"/>
-                                          </p:val>
-                                        </p:tav>
-                                        <p:tav tm="100000">
-                                          <p:val>
-                                            <p:strVal val="#ppt_y"/>
-                                          </p:val>
-                                        </p:tav>
-                                      </p:tavLst>
-                                    </p:anim>
-                                  </p:childTnLst>
-                                </p:cTn>
-                              </p:par>
-                            </p:childTnLst>
-                          </p:cTn>
-                        </p:par>
-                      </p:childTnLst>
-                    </p:cTn>
-                  </p:par>
-                </p:childTnLst>
-              </p:cTn>
-              <p:prevCondLst>
-                <p:cond evt="onPrev" delay="0">
-                  <p:tgtEl>
-                    <p:sldTgt/>
-                  </p:tgtEl>
-                </p:cond>
-              </p:prevCondLst>
-              <p:nextCondLst>
-                <p:cond evt="onNext" delay="0">
-                  <p:tgtEl>
-                    <p:sldTgt/>
-                  </p:tgtEl>
-                </p:cond>
-              </p:nextCondLst>
-            </p:seq>
-          </p:childTnLst>
-        </p:cTn>
-      </p:par>
-    </p:tnLst>
-    <p:bldLst>
-      <p:bldP spid="4" grpId="0"/>
-      <p:bldP spid="7" grpId="0"/>
-      <p:bldP spid="8" grpId="0"/>
-    </p:bldLst>
-  </p:timing>
 </p:sld>
 </file>
 
@@ -12380,68 +11461,20 @@
       </p:sp>
       <p:sp>
         <p:nvSpPr>
-          <p:cNvPr id="25" name="Rounded Rectangle 24"/>
-          <p:cNvSpPr/>
-          <p:nvPr/>
-        </p:nvSpPr>
-        <p:spPr>
-          <a:xfrm>
-            <a:off x="914400" y="2514600"/>
-            <a:ext cx="8595360" cy="1005840"/>
-          </a:xfrm>
-          <a:prstGeom prst="roundRect">
-            <a:avLst/>
-          </a:prstGeom>
-          <a:solidFill>
-            <a:srgbClr val="F5F8FA"/>
-          </a:solidFill>
-          <a:ln>
-            <a:solidFill>
-              <a:srgbClr val="BECDD7"/>
-            </a:solidFill>
-          </a:ln>
-        </p:spPr>
-        <p:style>
-          <a:lnRef idx="1">
-            <a:schemeClr val="accent1"/>
-          </a:lnRef>
-          <a:fillRef idx="3">
-            <a:schemeClr val="accent1"/>
-          </a:fillRef>
-          <a:effectRef idx="2">
-            <a:schemeClr val="accent1"/>
-          </a:effectRef>
-          <a:fontRef idx="minor">
-            <a:schemeClr val="lt1"/>
-          </a:fontRef>
-        </p:style>
-        <p:txBody>
-          <a:bodyPr rtlCol="0" anchor="ctr" lIns="109728" rIns="109728" tIns="73152"/>
-          <a:lstStyle/>
-          <a:p>
-            <a:pPr algn="ctr"/>
-            <a:r>
-              <a:rPr sz="1700" b="0">
-                <a:solidFill>
-                  <a:srgbClr val="2D2D2D"/>
-                </a:solidFill>
-                <a:latin typeface="Aptos"/>
-              </a:rPr>
-              <a:t>[Add your Seasonal Agriculture Performance Analysis GitHub repository link]</a:t>
-            </a:r>
-          </a:p>
-        </p:txBody>
-      </p:sp>
-      <p:sp>
-        <p:nvSpPr>
-          <p:cNvPr id="26" name="TextBox 25"/>
+          <p:cNvPr id="3" name="TextBox 2">
+            <a:extLst>
+              <a:ext uri="{FF2B5EF4-FFF2-40B4-BE49-F238E27FC236}">
+                <a16:creationId xmlns:a16="http://schemas.microsoft.com/office/drawing/2014/main" id="{7539B6B8-A1A9-C5FC-728A-62BEF7359593}"/>
+              </a:ext>
+            </a:extLst>
+          </p:cNvPr>
           <p:cNvSpPr txBox="1"/>
           <p:nvPr/>
         </p:nvSpPr>
         <p:spPr>
           <a:xfrm>
-            <a:off x="1005840" y="3794760"/>
-            <a:ext cx="8412480" cy="640080"/>
+            <a:off x="1280159" y="2300438"/>
+            <a:ext cx="8604985" cy="923330"/>
           </a:xfrm>
           <a:prstGeom prst="rect">
             <a:avLst/>
@@ -12449,21 +11482,36 @@
           <a:noFill/>
         </p:spPr>
         <p:txBody>
-          <a:bodyPr wrap="square">
+          <a:bodyPr wrap="square" rtlCol="0">
             <a:spAutoFit/>
           </a:bodyPr>
           <a:lstStyle/>
           <a:p>
-            <a:pPr algn="l"/>
-            <a:r>
-              <a:rPr sz="1200" b="0">
-                <a:solidFill>
-                  <a:srgbClr val="5A5A5A"/>
-                </a:solidFill>
-                <a:latin typeface="Aptos"/>
+            <a:r>
+              <a:rPr lang="en-IN" dirty="0" err="1">
+                <a:hlinkClick r:id="rId3"/>
               </a:rPr>
-              <a:t>The template contained a different repository link, so it was not copied into the final presentation.</a:t>
-            </a:r>
+              <a:t>MrunalKanade</a:t>
+            </a:r>
+            <a:r>
+              <a:rPr lang="en-IN" dirty="0">
+                <a:hlinkClick r:id="rId3"/>
+              </a:rPr>
+              <a:t>/Seasonal-Agriculture-Performance-Analysis: Data analytics project </a:t>
+            </a:r>
+            <a:r>
+              <a:rPr lang="en-IN" dirty="0" err="1">
+                <a:hlinkClick r:id="rId3"/>
+              </a:rPr>
+              <a:t>analyzing</a:t>
+            </a:r>
+            <a:r>
+              <a:rPr lang="en-IN" dirty="0">
+                <a:hlinkClick r:id="rId3"/>
+              </a:rPr>
+              <a:t> seasonal agricultural performance using Python, statistical analysis and data visualization.</a:t>
+            </a:r>
+            <a:endParaRPr lang="en-IN" dirty="0"/>
           </a:p>
         </p:txBody>
       </p:sp>
@@ -12477,348 +11525,6 @@
   <p:clrMapOvr>
     <a:masterClrMapping/>
   </p:clrMapOvr>
-  <p:timing>
-    <p:tnLst>
-      <p:par>
-        <p:cTn id="1" dur="indefinite" restart="never" nodeType="tmRoot">
-          <p:childTnLst>
-            <p:seq concurrent="1" nextAc="seek">
-              <p:cTn id="2" dur="indefinite" nodeType="mainSeq">
-                <p:childTnLst>
-                  <p:par>
-                    <p:cTn id="3" fill="hold">
-                      <p:stCondLst>
-                        <p:cond delay="indefinite"/>
-                      </p:stCondLst>
-                      <p:childTnLst>
-                        <p:par>
-                          <p:cTn id="4" fill="hold">
-                            <p:stCondLst>
-                              <p:cond delay="0"/>
-                            </p:stCondLst>
-                            <p:childTnLst>
-                              <p:par>
-                                <p:cTn id="5" presetID="53" presetClass="entr" presetSubtype="16" fill="hold" grpId="0" nodeType="clickEffect">
-                                  <p:stCondLst>
-                                    <p:cond delay="0"/>
-                                  </p:stCondLst>
-                                  <p:childTnLst>
-                                    <p:set>
-                                      <p:cBhvr>
-                                        <p:cTn id="6" dur="1" fill="hold">
-                                          <p:stCondLst>
-                                            <p:cond delay="0"/>
-                                          </p:stCondLst>
-                                        </p:cTn>
-                                        <p:tgtEl>
-                                          <p:spTgt spid="4"/>
-                                        </p:tgtEl>
-                                        <p:attrNameLst>
-                                          <p:attrName>style.visibility</p:attrName>
-                                        </p:attrNameLst>
-                                      </p:cBhvr>
-                                      <p:to>
-                                        <p:strVal val="visible"/>
-                                      </p:to>
-                                    </p:set>
-                                    <p:anim calcmode="lin" valueType="num">
-                                      <p:cBhvr>
-                                        <p:cTn id="7" dur="500" fill="hold"/>
-                                        <p:tgtEl>
-                                          <p:spTgt spid="4"/>
-                                        </p:tgtEl>
-                                        <p:attrNameLst>
-                                          <p:attrName>ppt_w</p:attrName>
-                                        </p:attrNameLst>
-                                      </p:cBhvr>
-                                      <p:tavLst>
-                                        <p:tav tm="0">
-                                          <p:val>
-                                            <p:fltVal val="0"/>
-                                          </p:val>
-                                        </p:tav>
-                                        <p:tav tm="100000">
-                                          <p:val>
-                                            <p:strVal val="#ppt_w"/>
-                                          </p:val>
-                                        </p:tav>
-                                      </p:tavLst>
-                                    </p:anim>
-                                    <p:anim calcmode="lin" valueType="num">
-                                      <p:cBhvr>
-                                        <p:cTn id="8" dur="500" fill="hold"/>
-                                        <p:tgtEl>
-                                          <p:spTgt spid="4"/>
-                                        </p:tgtEl>
-                                        <p:attrNameLst>
-                                          <p:attrName>ppt_h</p:attrName>
-                                        </p:attrNameLst>
-                                      </p:cBhvr>
-                                      <p:tavLst>
-                                        <p:tav tm="0">
-                                          <p:val>
-                                            <p:fltVal val="0"/>
-                                          </p:val>
-                                        </p:tav>
-                                        <p:tav tm="100000">
-                                          <p:val>
-                                            <p:strVal val="#ppt_h"/>
-                                          </p:val>
-                                        </p:tav>
-                                      </p:tavLst>
-                                    </p:anim>
-                                    <p:animEffect transition="in" filter="fade">
-                                      <p:cBhvr>
-                                        <p:cTn id="9" dur="500"/>
-                                        <p:tgtEl>
-                                          <p:spTgt spid="4"/>
-                                        </p:tgtEl>
-                                      </p:cBhvr>
-                                    </p:animEffect>
-                                  </p:childTnLst>
-                                </p:cTn>
-                              </p:par>
-                            </p:childTnLst>
-                          </p:cTn>
-                        </p:par>
-                      </p:childTnLst>
-                    </p:cTn>
-                  </p:par>
-                  <p:par>
-                    <p:cTn id="10" fill="hold">
-                      <p:stCondLst>
-                        <p:cond delay="indefinite"/>
-                      </p:stCondLst>
-                      <p:childTnLst>
-                        <p:par>
-                          <p:cTn id="11" fill="hold">
-                            <p:stCondLst>
-                              <p:cond delay="0"/>
-                            </p:stCondLst>
-                            <p:childTnLst>
-                              <p:par>
-                                <p:cTn id="12" presetID="42" presetClass="entr" presetSubtype="0" fill="hold" grpId="0" nodeType="clickEffect" nodePh="1">
-                                  <p:stCondLst>
-                                    <p:cond delay="0"/>
-                                  </p:stCondLst>
-                                  <p:endCondLst>
-                                    <p:cond evt="begin" delay="0">
-                                      <p:tn val="12"/>
-                                    </p:cond>
-                                  </p:endCondLst>
-                                  <p:childTnLst>
-                                    <p:set>
-                                      <p:cBhvr>
-                                        <p:cTn id="13" dur="1" fill="hold">
-                                          <p:stCondLst>
-                                            <p:cond delay="0"/>
-                                          </p:stCondLst>
-                                        </p:cTn>
-                                        <p:tgtEl>
-                                          <p:spTgt spid="7"/>
-                                        </p:tgtEl>
-                                        <p:attrNameLst>
-                                          <p:attrName>style.visibility</p:attrName>
-                                        </p:attrNameLst>
-                                      </p:cBhvr>
-                                      <p:to>
-                                        <p:strVal val="visible"/>
-                                      </p:to>
-                                    </p:set>
-                                    <p:animEffect transition="in" filter="fade">
-                                      <p:cBhvr>
-                                        <p:cTn id="14" dur="1000"/>
-                                        <p:tgtEl>
-                                          <p:spTgt spid="7"/>
-                                        </p:tgtEl>
-                                      </p:cBhvr>
-                                    </p:animEffect>
-                                    <p:anim calcmode="lin" valueType="num">
-                                      <p:cBhvr>
-                                        <p:cTn id="15" dur="1000" fill="hold"/>
-                                        <p:tgtEl>
-                                          <p:spTgt spid="7"/>
-                                        </p:tgtEl>
-                                        <p:attrNameLst>
-                                          <p:attrName>ppt_x</p:attrName>
-                                        </p:attrNameLst>
-                                      </p:cBhvr>
-                                      <p:tavLst>
-                                        <p:tav tm="0">
-                                          <p:val>
-                                            <p:strVal val="#ppt_x"/>
-                                          </p:val>
-                                        </p:tav>
-                                        <p:tav tm="100000">
-                                          <p:val>
-                                            <p:strVal val="#ppt_x"/>
-                                          </p:val>
-                                        </p:tav>
-                                      </p:tavLst>
-                                    </p:anim>
-                                    <p:anim calcmode="lin" valueType="num">
-                                      <p:cBhvr>
-                                        <p:cTn id="16" dur="1000" fill="hold"/>
-                                        <p:tgtEl>
-                                          <p:spTgt spid="7"/>
-                                        </p:tgtEl>
-                                        <p:attrNameLst>
-                                          <p:attrName>ppt_y</p:attrName>
-                                        </p:attrNameLst>
-                                      </p:cBhvr>
-                                      <p:tavLst>
-                                        <p:tav tm="0">
-                                          <p:val>
-                                            <p:strVal val="#ppt_y+.1"/>
-                                          </p:val>
-                                        </p:tav>
-                                        <p:tav tm="100000">
-                                          <p:val>
-                                            <p:strVal val="#ppt_y"/>
-                                          </p:val>
-                                        </p:tav>
-                                      </p:tavLst>
-                                    </p:anim>
-                                  </p:childTnLst>
-                                </p:cTn>
-                              </p:par>
-                            </p:childTnLst>
-                          </p:cTn>
-                        </p:par>
-                      </p:childTnLst>
-                    </p:cTn>
-                  </p:par>
-                  <p:par>
-                    <p:cTn id="17" fill="hold">
-                      <p:stCondLst>
-                        <p:cond delay="indefinite"/>
-                      </p:stCondLst>
-                      <p:childTnLst>
-                        <p:par>
-                          <p:cTn id="18" fill="hold">
-                            <p:stCondLst>
-                              <p:cond delay="0"/>
-                            </p:stCondLst>
-                            <p:childTnLst>
-                              <p:par>
-                                <p:cTn id="19" presetID="42" presetClass="entr" presetSubtype="0" fill="hold" grpId="0" nodeType="clickEffect" nodePh="1">
-                                  <p:stCondLst>
-                                    <p:cond delay="0"/>
-                                  </p:stCondLst>
-                                  <p:endCondLst>
-                                    <p:cond evt="begin" delay="0">
-                                      <p:tn val="19"/>
-                                    </p:cond>
-                                  </p:endCondLst>
-                                  <p:childTnLst>
-                                    <p:set>
-                                      <p:cBhvr>
-                                        <p:cTn id="20" dur="1" fill="hold">
-                                          <p:stCondLst>
-                                            <p:cond delay="0"/>
-                                          </p:stCondLst>
-                                        </p:cTn>
-                                        <p:tgtEl>
-                                          <p:spTgt spid="8"/>
-                                        </p:tgtEl>
-                                        <p:attrNameLst>
-                                          <p:attrName>style.visibility</p:attrName>
-                                        </p:attrNameLst>
-                                      </p:cBhvr>
-                                      <p:to>
-                                        <p:strVal val="visible"/>
-                                      </p:to>
-                                    </p:set>
-                                    <p:animEffect transition="in" filter="fade">
-                                      <p:cBhvr>
-                                        <p:cTn id="21" dur="1000"/>
-                                        <p:tgtEl>
-                                          <p:spTgt spid="8"/>
-                                        </p:tgtEl>
-                                      </p:cBhvr>
-                                    </p:animEffect>
-                                    <p:anim calcmode="lin" valueType="num">
-                                      <p:cBhvr>
-                                        <p:cTn id="22" dur="1000" fill="hold"/>
-                                        <p:tgtEl>
-                                          <p:spTgt spid="8"/>
-                                        </p:tgtEl>
-                                        <p:attrNameLst>
-                                          <p:attrName>ppt_x</p:attrName>
-                                        </p:attrNameLst>
-                                      </p:cBhvr>
-                                      <p:tavLst>
-                                        <p:tav tm="0">
-                                          <p:val>
-                                            <p:strVal val="#ppt_x"/>
-                                          </p:val>
-                                        </p:tav>
-                                        <p:tav tm="100000">
-                                          <p:val>
-                                            <p:strVal val="#ppt_x"/>
-                                          </p:val>
-                                        </p:tav>
-                                      </p:tavLst>
-                                    </p:anim>
-                                    <p:anim calcmode="lin" valueType="num">
-                                      <p:cBhvr>
-                                        <p:cTn id="23" dur="1000" fill="hold"/>
-                                        <p:tgtEl>
-                                          <p:spTgt spid="8"/>
-                                        </p:tgtEl>
-                                        <p:attrNameLst>
-                                          <p:attrName>ppt_y</p:attrName>
-                                        </p:attrNameLst>
-                                      </p:cBhvr>
-                                      <p:tavLst>
-                                        <p:tav tm="0">
-                                          <p:val>
-                                            <p:strVal val="#ppt_y+.1"/>
-                                          </p:val>
-                                        </p:tav>
-                                        <p:tav tm="100000">
-                                          <p:val>
-                                            <p:strVal val="#ppt_y"/>
-                                          </p:val>
-                                        </p:tav>
-                                      </p:tavLst>
-                                    </p:anim>
-                                  </p:childTnLst>
-                                </p:cTn>
-                              </p:par>
-                            </p:childTnLst>
-                          </p:cTn>
-                        </p:par>
-                      </p:childTnLst>
-                    </p:cTn>
-                  </p:par>
-                </p:childTnLst>
-              </p:cTn>
-              <p:prevCondLst>
-                <p:cond evt="onPrev" delay="0">
-                  <p:tgtEl>
-                    <p:sldTgt/>
-                  </p:tgtEl>
-                </p:cond>
-              </p:prevCondLst>
-              <p:nextCondLst>
-                <p:cond evt="onNext" delay="0">
-                  <p:tgtEl>
-                    <p:sldTgt/>
-                  </p:tgtEl>
-                </p:cond>
-              </p:nextCondLst>
-            </p:seq>
-          </p:childTnLst>
-        </p:cTn>
-      </p:par>
-    </p:tnLst>
-    <p:bldLst>
-      <p:bldP spid="4" grpId="0"/>
-      <p:bldP spid="7" grpId="0"/>
-      <p:bldP spid="8" grpId="0"/>
-    </p:bldLst>
-  </p:timing>
 </p:sld>
 </file>
 
@@ -12898,7 +11604,7 @@
         </p:spPr>
         <p:txBody>
           <a:bodyPr>
-            <a:normAutofit fontScale="90000"/>
+            <a:normAutofit/>
           </a:bodyPr>
           <a:lstStyle/>
           <a:p>
@@ -12914,92 +11620,36 @@
           </a:p>
         </p:txBody>
       </p:sp>
-      <p:sp>
-        <p:nvSpPr>
-          <p:cNvPr id="24" name="Rounded Rectangle 23"/>
-          <p:cNvSpPr/>
+      <p:pic>
+        <p:nvPicPr>
+          <p:cNvPr id="3" name="Picture 2">
+            <a:extLst>
+              <a:ext uri="{FF2B5EF4-FFF2-40B4-BE49-F238E27FC236}">
+                <a16:creationId xmlns:a16="http://schemas.microsoft.com/office/drawing/2014/main" id="{4B99FD7C-1142-601D-E69D-B250F5B4C0EF}"/>
+              </a:ext>
+            </a:extLst>
+          </p:cNvPr>
+          <p:cNvPicPr>
+            <a:picLocks noChangeAspect="1"/>
+          </p:cNvPicPr>
           <p:nvPr/>
-        </p:nvSpPr>
-        <p:spPr>
-          <a:xfrm>
-            <a:off x="1828800" y="1554480"/>
-            <a:ext cx="6766560" cy="3108960"/>
-          </a:xfrm>
-          <a:prstGeom prst="roundRect">
+        </p:nvPicPr>
+        <p:blipFill>
+          <a:blip r:embed="rId3"/>
+          <a:stretch>
+            <a:fillRect/>
+          </a:stretch>
+        </p:blipFill>
+        <p:spPr>
+          <a:xfrm>
+            <a:off x="1915427" y="1255246"/>
+            <a:ext cx="8051097" cy="4920269"/>
+          </a:xfrm>
+          <a:prstGeom prst="rect">
             <a:avLst/>
           </a:prstGeom>
-          <a:solidFill>
-            <a:srgbClr val="F8F8F8"/>
-          </a:solidFill>
-          <a:ln>
-            <a:solidFill>
-              <a:srgbClr val="AAAAAA"/>
-            </a:solidFill>
-          </a:ln>
-        </p:spPr>
-        <p:style>
-          <a:lnRef idx="1">
-            <a:schemeClr val="accent1"/>
-          </a:lnRef>
-          <a:fillRef idx="3">
-            <a:schemeClr val="accent1"/>
-          </a:fillRef>
-          <a:effectRef idx="2">
-            <a:schemeClr val="accent1"/>
-          </a:effectRef>
-          <a:fontRef idx="minor">
-            <a:schemeClr val="lt1"/>
-          </a:fontRef>
-        </p:style>
-        <p:txBody>
-          <a:bodyPr rtlCol="0" anchor="ctr" lIns="109728" rIns="109728" tIns="73152"/>
-          <a:lstStyle/>
-          <a:p>
-            <a:pPr algn="ctr"/>
-            <a:r>
-              <a:rPr sz="2000" b="1">
-                <a:solidFill>
-                  <a:srgbClr val="2D2D2D"/>
-                </a:solidFill>
-                <a:latin typeface="Aptos"/>
-              </a:rPr>
-              <a:t>CERTIFICATE</a:t>
-            </a:r>
-            <a:br/>
-            <a:br/>
-            <a:r>
-              <a:rPr sz="2000" b="1">
-                <a:solidFill>
-                  <a:srgbClr val="2D2D2D"/>
-                </a:solidFill>
-                <a:latin typeface="Aptos"/>
-              </a:rPr>
-              <a:t>VOIS Course Completion</a:t>
-            </a:r>
-            <a:br/>
-            <a:r>
-              <a:rPr sz="2000" b="1">
-                <a:solidFill>
-                  <a:srgbClr val="2D2D2D"/>
-                </a:solidFill>
-                <a:latin typeface="Aptos"/>
-              </a:rPr>
-              <a:t>Data Visualization</a:t>
-            </a:r>
-            <a:br/>
-            <a:br/>
-            <a:r>
-              <a:rPr sz="2000" b="1">
-                <a:solidFill>
-                  <a:srgbClr val="2D2D2D"/>
-                </a:solidFill>
-                <a:latin typeface="Aptos"/>
-              </a:rPr>
-              <a:t>[Insert certificate screenshot here]</a:t>
-            </a:r>
-          </a:p>
-        </p:txBody>
-      </p:sp>
+        </p:spPr>
+      </p:pic>
     </p:spTree>
     <p:extLst>
       <p:ext uri="{BB962C8B-B14F-4D97-AF65-F5344CB8AC3E}">
@@ -13010,348 +11660,6 @@
   <p:clrMapOvr>
     <a:masterClrMapping/>
   </p:clrMapOvr>
-  <p:timing>
-    <p:tnLst>
-      <p:par>
-        <p:cTn id="1" dur="indefinite" restart="never" nodeType="tmRoot">
-          <p:childTnLst>
-            <p:seq concurrent="1" nextAc="seek">
-              <p:cTn id="2" dur="indefinite" nodeType="mainSeq">
-                <p:childTnLst>
-                  <p:par>
-                    <p:cTn id="3" fill="hold">
-                      <p:stCondLst>
-                        <p:cond delay="indefinite"/>
-                      </p:stCondLst>
-                      <p:childTnLst>
-                        <p:par>
-                          <p:cTn id="4" fill="hold">
-                            <p:stCondLst>
-                              <p:cond delay="0"/>
-                            </p:stCondLst>
-                            <p:childTnLst>
-                              <p:par>
-                                <p:cTn id="5" presetID="53" presetClass="entr" presetSubtype="16" fill="hold" grpId="0" nodeType="clickEffect">
-                                  <p:stCondLst>
-                                    <p:cond delay="0"/>
-                                  </p:stCondLst>
-                                  <p:childTnLst>
-                                    <p:set>
-                                      <p:cBhvr>
-                                        <p:cTn id="6" dur="1" fill="hold">
-                                          <p:stCondLst>
-                                            <p:cond delay="0"/>
-                                          </p:stCondLst>
-                                        </p:cTn>
-                                        <p:tgtEl>
-                                          <p:spTgt spid="4"/>
-                                        </p:tgtEl>
-                                        <p:attrNameLst>
-                                          <p:attrName>style.visibility</p:attrName>
-                                        </p:attrNameLst>
-                                      </p:cBhvr>
-                                      <p:to>
-                                        <p:strVal val="visible"/>
-                                      </p:to>
-                                    </p:set>
-                                    <p:anim calcmode="lin" valueType="num">
-                                      <p:cBhvr>
-                                        <p:cTn id="7" dur="500" fill="hold"/>
-                                        <p:tgtEl>
-                                          <p:spTgt spid="4"/>
-                                        </p:tgtEl>
-                                        <p:attrNameLst>
-                                          <p:attrName>ppt_w</p:attrName>
-                                        </p:attrNameLst>
-                                      </p:cBhvr>
-                                      <p:tavLst>
-                                        <p:tav tm="0">
-                                          <p:val>
-                                            <p:fltVal val="0"/>
-                                          </p:val>
-                                        </p:tav>
-                                        <p:tav tm="100000">
-                                          <p:val>
-                                            <p:strVal val="#ppt_w"/>
-                                          </p:val>
-                                        </p:tav>
-                                      </p:tavLst>
-                                    </p:anim>
-                                    <p:anim calcmode="lin" valueType="num">
-                                      <p:cBhvr>
-                                        <p:cTn id="8" dur="500" fill="hold"/>
-                                        <p:tgtEl>
-                                          <p:spTgt spid="4"/>
-                                        </p:tgtEl>
-                                        <p:attrNameLst>
-                                          <p:attrName>ppt_h</p:attrName>
-                                        </p:attrNameLst>
-                                      </p:cBhvr>
-                                      <p:tavLst>
-                                        <p:tav tm="0">
-                                          <p:val>
-                                            <p:fltVal val="0"/>
-                                          </p:val>
-                                        </p:tav>
-                                        <p:tav tm="100000">
-                                          <p:val>
-                                            <p:strVal val="#ppt_h"/>
-                                          </p:val>
-                                        </p:tav>
-                                      </p:tavLst>
-                                    </p:anim>
-                                    <p:animEffect transition="in" filter="fade">
-                                      <p:cBhvr>
-                                        <p:cTn id="9" dur="500"/>
-                                        <p:tgtEl>
-                                          <p:spTgt spid="4"/>
-                                        </p:tgtEl>
-                                      </p:cBhvr>
-                                    </p:animEffect>
-                                  </p:childTnLst>
-                                </p:cTn>
-                              </p:par>
-                            </p:childTnLst>
-                          </p:cTn>
-                        </p:par>
-                      </p:childTnLst>
-                    </p:cTn>
-                  </p:par>
-                  <p:par>
-                    <p:cTn id="10" fill="hold">
-                      <p:stCondLst>
-                        <p:cond delay="indefinite"/>
-                      </p:stCondLst>
-                      <p:childTnLst>
-                        <p:par>
-                          <p:cTn id="11" fill="hold">
-                            <p:stCondLst>
-                              <p:cond delay="0"/>
-                            </p:stCondLst>
-                            <p:childTnLst>
-                              <p:par>
-                                <p:cTn id="12" presetID="42" presetClass="entr" presetSubtype="0" fill="hold" grpId="0" nodeType="clickEffect" nodePh="1">
-                                  <p:stCondLst>
-                                    <p:cond delay="0"/>
-                                  </p:stCondLst>
-                                  <p:endCondLst>
-                                    <p:cond evt="begin" delay="0">
-                                      <p:tn val="12"/>
-                                    </p:cond>
-                                  </p:endCondLst>
-                                  <p:childTnLst>
-                                    <p:set>
-                                      <p:cBhvr>
-                                        <p:cTn id="13" dur="1" fill="hold">
-                                          <p:stCondLst>
-                                            <p:cond delay="0"/>
-                                          </p:stCondLst>
-                                        </p:cTn>
-                                        <p:tgtEl>
-                                          <p:spTgt spid="7"/>
-                                        </p:tgtEl>
-                                        <p:attrNameLst>
-                                          <p:attrName>style.visibility</p:attrName>
-                                        </p:attrNameLst>
-                                      </p:cBhvr>
-                                      <p:to>
-                                        <p:strVal val="visible"/>
-                                      </p:to>
-                                    </p:set>
-                                    <p:animEffect transition="in" filter="fade">
-                                      <p:cBhvr>
-                                        <p:cTn id="14" dur="1000"/>
-                                        <p:tgtEl>
-                                          <p:spTgt spid="7"/>
-                                        </p:tgtEl>
-                                      </p:cBhvr>
-                                    </p:animEffect>
-                                    <p:anim calcmode="lin" valueType="num">
-                                      <p:cBhvr>
-                                        <p:cTn id="15" dur="1000" fill="hold"/>
-                                        <p:tgtEl>
-                                          <p:spTgt spid="7"/>
-                                        </p:tgtEl>
-                                        <p:attrNameLst>
-                                          <p:attrName>ppt_x</p:attrName>
-                                        </p:attrNameLst>
-                                      </p:cBhvr>
-                                      <p:tavLst>
-                                        <p:tav tm="0">
-                                          <p:val>
-                                            <p:strVal val="#ppt_x"/>
-                                          </p:val>
-                                        </p:tav>
-                                        <p:tav tm="100000">
-                                          <p:val>
-                                            <p:strVal val="#ppt_x"/>
-                                          </p:val>
-                                        </p:tav>
-                                      </p:tavLst>
-                                    </p:anim>
-                                    <p:anim calcmode="lin" valueType="num">
-                                      <p:cBhvr>
-                                        <p:cTn id="16" dur="1000" fill="hold"/>
-                                        <p:tgtEl>
-                                          <p:spTgt spid="7"/>
-                                        </p:tgtEl>
-                                        <p:attrNameLst>
-                                          <p:attrName>ppt_y</p:attrName>
-                                        </p:attrNameLst>
-                                      </p:cBhvr>
-                                      <p:tavLst>
-                                        <p:tav tm="0">
-                                          <p:val>
-                                            <p:strVal val="#ppt_y+.1"/>
-                                          </p:val>
-                                        </p:tav>
-                                        <p:tav tm="100000">
-                                          <p:val>
-                                            <p:strVal val="#ppt_y"/>
-                                          </p:val>
-                                        </p:tav>
-                                      </p:tavLst>
-                                    </p:anim>
-                                  </p:childTnLst>
-                                </p:cTn>
-                              </p:par>
-                            </p:childTnLst>
-                          </p:cTn>
-                        </p:par>
-                      </p:childTnLst>
-                    </p:cTn>
-                  </p:par>
-                  <p:par>
-                    <p:cTn id="17" fill="hold">
-                      <p:stCondLst>
-                        <p:cond delay="indefinite"/>
-                      </p:stCondLst>
-                      <p:childTnLst>
-                        <p:par>
-                          <p:cTn id="18" fill="hold">
-                            <p:stCondLst>
-                              <p:cond delay="0"/>
-                            </p:stCondLst>
-                            <p:childTnLst>
-                              <p:par>
-                                <p:cTn id="19" presetID="42" presetClass="entr" presetSubtype="0" fill="hold" grpId="0" nodeType="clickEffect" nodePh="1">
-                                  <p:stCondLst>
-                                    <p:cond delay="0"/>
-                                  </p:stCondLst>
-                                  <p:endCondLst>
-                                    <p:cond evt="begin" delay="0">
-                                      <p:tn val="19"/>
-                                    </p:cond>
-                                  </p:endCondLst>
-                                  <p:childTnLst>
-                                    <p:set>
-                                      <p:cBhvr>
-                                        <p:cTn id="20" dur="1" fill="hold">
-                                          <p:stCondLst>
-                                            <p:cond delay="0"/>
-                                          </p:stCondLst>
-                                        </p:cTn>
-                                        <p:tgtEl>
-                                          <p:spTgt spid="8"/>
-                                        </p:tgtEl>
-                                        <p:attrNameLst>
-                                          <p:attrName>style.visibility</p:attrName>
-                                        </p:attrNameLst>
-                                      </p:cBhvr>
-                                      <p:to>
-                                        <p:strVal val="visible"/>
-                                      </p:to>
-                                    </p:set>
-                                    <p:animEffect transition="in" filter="fade">
-                                      <p:cBhvr>
-                                        <p:cTn id="21" dur="1000"/>
-                                        <p:tgtEl>
-                                          <p:spTgt spid="8"/>
-                                        </p:tgtEl>
-                                      </p:cBhvr>
-                                    </p:animEffect>
-                                    <p:anim calcmode="lin" valueType="num">
-                                      <p:cBhvr>
-                                        <p:cTn id="22" dur="1000" fill="hold"/>
-                                        <p:tgtEl>
-                                          <p:spTgt spid="8"/>
-                                        </p:tgtEl>
-                                        <p:attrNameLst>
-                                          <p:attrName>ppt_x</p:attrName>
-                                        </p:attrNameLst>
-                                      </p:cBhvr>
-                                      <p:tavLst>
-                                        <p:tav tm="0">
-                                          <p:val>
-                                            <p:strVal val="#ppt_x"/>
-                                          </p:val>
-                                        </p:tav>
-                                        <p:tav tm="100000">
-                                          <p:val>
-                                            <p:strVal val="#ppt_x"/>
-                                          </p:val>
-                                        </p:tav>
-                                      </p:tavLst>
-                                    </p:anim>
-                                    <p:anim calcmode="lin" valueType="num">
-                                      <p:cBhvr>
-                                        <p:cTn id="23" dur="1000" fill="hold"/>
-                                        <p:tgtEl>
-                                          <p:spTgt spid="8"/>
-                                        </p:tgtEl>
-                                        <p:attrNameLst>
-                                          <p:attrName>ppt_y</p:attrName>
-                                        </p:attrNameLst>
-                                      </p:cBhvr>
-                                      <p:tavLst>
-                                        <p:tav tm="0">
-                                          <p:val>
-                                            <p:strVal val="#ppt_y+.1"/>
-                                          </p:val>
-                                        </p:tav>
-                                        <p:tav tm="100000">
-                                          <p:val>
-                                            <p:strVal val="#ppt_y"/>
-                                          </p:val>
-                                        </p:tav>
-                                      </p:tavLst>
-                                    </p:anim>
-                                  </p:childTnLst>
-                                </p:cTn>
-                              </p:par>
-                            </p:childTnLst>
-                          </p:cTn>
-                        </p:par>
-                      </p:childTnLst>
-                    </p:cTn>
-                  </p:par>
-                </p:childTnLst>
-              </p:cTn>
-              <p:prevCondLst>
-                <p:cond evt="onPrev" delay="0">
-                  <p:tgtEl>
-                    <p:sldTgt/>
-                  </p:tgtEl>
-                </p:cond>
-              </p:prevCondLst>
-              <p:nextCondLst>
-                <p:cond evt="onNext" delay="0">
-                  <p:tgtEl>
-                    <p:sldTgt/>
-                  </p:tgtEl>
-                </p:cond>
-              </p:nextCondLst>
-            </p:seq>
-          </p:childTnLst>
-        </p:cTn>
-      </p:par>
-    </p:tnLst>
-    <p:bldLst>
-      <p:bldP spid="4" grpId="0"/>
-      <p:bldP spid="7" grpId="0"/>
-      <p:bldP spid="8" grpId="0"/>
-    </p:bldLst>
-  </p:timing>
 </p:sld>
 </file>
 
@@ -13395,7 +11703,7 @@
         </p:spPr>
         <p:txBody>
           <a:bodyPr anchor="ctr">
-            <a:normAutofit fontScale="90000"/>
+            <a:normAutofit/>
           </a:bodyPr>
           <a:lstStyle/>
           <a:p>
@@ -13503,41 +11811,6 @@
           </a:p>
         </p:txBody>
       </p:sp>
-      <p:sp>
-        <p:nvSpPr>
-          <p:cNvPr id="46" name="TextBox 45"/>
-          <p:cNvSpPr txBox="1"/>
-          <p:nvPr/>
-        </p:nvSpPr>
-        <p:spPr>
-          <a:xfrm>
-            <a:off x="2743200" y="3657600"/>
-            <a:ext cx="5486400" cy="548640"/>
-          </a:xfrm>
-          <a:prstGeom prst="rect">
-            <a:avLst/>
-          </a:prstGeom>
-          <a:noFill/>
-        </p:spPr>
-        <p:txBody>
-          <a:bodyPr wrap="square">
-            <a:spAutoFit/>
-          </a:bodyPr>
-          <a:lstStyle/>
-          <a:p>
-            <a:pPr algn="ctr"/>
-            <a:r>
-              <a:rPr sz="2000" b="1">
-                <a:solidFill>
-                  <a:srgbClr val="282828"/>
-                </a:solidFill>
-                <a:latin typeface="Aptos"/>
-              </a:rPr>
-              <a:t>Questions / Discussion</a:t>
-            </a:r>
-          </a:p>
-        </p:txBody>
-      </p:sp>
     </p:spTree>
     <p:extLst>
       <p:ext uri="{BB962C8B-B14F-4D97-AF65-F5344CB8AC3E}">
@@ -13548,632 +11821,6 @@
   <p:clrMapOvr>
     <a:masterClrMapping/>
   </p:clrMapOvr>
-  <p:timing>
-    <p:tnLst>
-      <p:par>
-        <p:cTn id="1" dur="indefinite" restart="never" nodeType="tmRoot">
-          <p:childTnLst>
-            <p:seq concurrent="1" nextAc="seek">
-              <p:cTn id="2" dur="indefinite" nodeType="mainSeq">
-                <p:childTnLst>
-                  <p:par>
-                    <p:cTn id="3" fill="hold">
-                      <p:stCondLst>
-                        <p:cond delay="indefinite"/>
-                      </p:stCondLst>
-                      <p:childTnLst>
-                        <p:par>
-                          <p:cTn id="4" fill="hold">
-                            <p:stCondLst>
-                              <p:cond delay="0"/>
-                            </p:stCondLst>
-                            <p:childTnLst>
-                              <p:par>
-                                <p:cTn id="5" presetID="53" presetClass="entr" presetSubtype="16" fill="hold" grpId="0" nodeType="clickEffect">
-                                  <p:stCondLst>
-                                    <p:cond delay="0"/>
-                                  </p:stCondLst>
-                                  <p:childTnLst>
-                                    <p:set>
-                                      <p:cBhvr>
-                                        <p:cTn id="6" dur="1" fill="hold">
-                                          <p:stCondLst>
-                                            <p:cond delay="0"/>
-                                          </p:stCondLst>
-                                        </p:cTn>
-                                        <p:tgtEl>
-                                          <p:spTgt spid="3"/>
-                                        </p:tgtEl>
-                                        <p:attrNameLst>
-                                          <p:attrName>style.visibility</p:attrName>
-                                        </p:attrNameLst>
-                                      </p:cBhvr>
-                                      <p:to>
-                                        <p:strVal val="visible"/>
-                                      </p:to>
-                                    </p:set>
-                                    <p:anim calcmode="lin" valueType="num">
-                                      <p:cBhvr>
-                                        <p:cTn id="7" dur="500" fill="hold"/>
-                                        <p:tgtEl>
-                                          <p:spTgt spid="3"/>
-                                        </p:tgtEl>
-                                        <p:attrNameLst>
-                                          <p:attrName>ppt_w</p:attrName>
-                                        </p:attrNameLst>
-                                      </p:cBhvr>
-                                      <p:tavLst>
-                                        <p:tav tm="0">
-                                          <p:val>
-                                            <p:fltVal val="0"/>
-                                          </p:val>
-                                        </p:tav>
-                                        <p:tav tm="100000">
-                                          <p:val>
-                                            <p:strVal val="#ppt_w"/>
-                                          </p:val>
-                                        </p:tav>
-                                      </p:tavLst>
-                                    </p:anim>
-                                    <p:anim calcmode="lin" valueType="num">
-                                      <p:cBhvr>
-                                        <p:cTn id="8" dur="500" fill="hold"/>
-                                        <p:tgtEl>
-                                          <p:spTgt spid="3"/>
-                                        </p:tgtEl>
-                                        <p:attrNameLst>
-                                          <p:attrName>ppt_h</p:attrName>
-                                        </p:attrNameLst>
-                                      </p:cBhvr>
-                                      <p:tavLst>
-                                        <p:tav tm="0">
-                                          <p:val>
-                                            <p:fltVal val="0"/>
-                                          </p:val>
-                                        </p:tav>
-                                        <p:tav tm="100000">
-                                          <p:val>
-                                            <p:strVal val="#ppt_h"/>
-                                          </p:val>
-                                        </p:tav>
-                                      </p:tavLst>
-                                    </p:anim>
-                                    <p:animEffect transition="in" filter="fade">
-                                      <p:cBhvr>
-                                        <p:cTn id="9" dur="500"/>
-                                        <p:tgtEl>
-                                          <p:spTgt spid="3"/>
-                                        </p:tgtEl>
-                                      </p:cBhvr>
-                                    </p:animEffect>
-                                  </p:childTnLst>
-                                </p:cTn>
-                              </p:par>
-                            </p:childTnLst>
-                          </p:cTn>
-                        </p:par>
-                      </p:childTnLst>
-                    </p:cTn>
-                  </p:par>
-                  <p:par>
-                    <p:cTn id="10" fill="hold">
-                      <p:stCondLst>
-                        <p:cond delay="indefinite"/>
-                      </p:stCondLst>
-                      <p:childTnLst>
-                        <p:par>
-                          <p:cTn id="11" fill="hold">
-                            <p:stCondLst>
-                              <p:cond delay="0"/>
-                            </p:stCondLst>
-                            <p:childTnLst>
-                              <p:par>
-                                <p:cTn id="12" presetID="12" presetClass="entr" presetSubtype="4" fill="hold" grpId="0" nodeType="clickEffect" nodePh="1">
-                                  <p:stCondLst>
-                                    <p:cond delay="0"/>
-                                  </p:stCondLst>
-                                  <p:endCondLst>
-                                    <p:cond evt="begin" delay="0">
-                                      <p:tn val="12"/>
-                                    </p:cond>
-                                  </p:endCondLst>
-                                  <p:childTnLst>
-                                    <p:set>
-                                      <p:cBhvr>
-                                        <p:cTn id="13" dur="1" fill="hold">
-                                          <p:stCondLst>
-                                            <p:cond delay="0"/>
-                                          </p:stCondLst>
-                                        </p:cTn>
-                                        <p:tgtEl>
-                                          <p:spTgt spid="17"/>
-                                        </p:tgtEl>
-                                        <p:attrNameLst>
-                                          <p:attrName>style.visibility</p:attrName>
-                                        </p:attrNameLst>
-                                      </p:cBhvr>
-                                      <p:to>
-                                        <p:strVal val="visible"/>
-                                      </p:to>
-                                    </p:set>
-                                    <p:anim calcmode="lin" valueType="num">
-                                      <p:cBhvr additive="base">
-                                        <p:cTn id="14" dur="500"/>
-                                        <p:tgtEl>
-                                          <p:spTgt spid="17"/>
-                                        </p:tgtEl>
-                                        <p:attrNameLst>
-                                          <p:attrName>ppt_y</p:attrName>
-                                        </p:attrNameLst>
-                                      </p:cBhvr>
-                                      <p:tavLst>
-                                        <p:tav tm="0">
-                                          <p:val>
-                                            <p:strVal val="#ppt_y+#ppt_h*1.125000"/>
-                                          </p:val>
-                                        </p:tav>
-                                        <p:tav tm="100000">
-                                          <p:val>
-                                            <p:strVal val="#ppt_y"/>
-                                          </p:val>
-                                        </p:tav>
-                                      </p:tavLst>
-                                    </p:anim>
-                                    <p:animEffect transition="in" filter="wipe(up)">
-                                      <p:cBhvr>
-                                        <p:cTn id="15" dur="500"/>
-                                        <p:tgtEl>
-                                          <p:spTgt spid="17"/>
-                                        </p:tgtEl>
-                                      </p:cBhvr>
-                                    </p:animEffect>
-                                  </p:childTnLst>
-                                </p:cTn>
-                              </p:par>
-                            </p:childTnLst>
-                          </p:cTn>
-                        </p:par>
-                      </p:childTnLst>
-                    </p:cTn>
-                  </p:par>
-                  <p:par>
-                    <p:cTn id="16" fill="hold">
-                      <p:stCondLst>
-                        <p:cond delay="indefinite"/>
-                      </p:stCondLst>
-                      <p:childTnLst>
-                        <p:par>
-                          <p:cTn id="17" fill="hold">
-                            <p:stCondLst>
-                              <p:cond delay="0"/>
-                            </p:stCondLst>
-                            <p:childTnLst>
-                              <p:par>
-                                <p:cTn id="18" presetID="12" presetClass="entr" presetSubtype="4" fill="hold" grpId="0" nodeType="clickEffect">
-                                  <p:stCondLst>
-                                    <p:cond delay="0"/>
-                                  </p:stCondLst>
-                                  <p:childTnLst>
-                                    <p:set>
-                                      <p:cBhvr>
-                                        <p:cTn id="19" dur="1" fill="hold">
-                                          <p:stCondLst>
-                                            <p:cond delay="0"/>
-                                          </p:stCondLst>
-                                        </p:cTn>
-                                        <p:tgtEl>
-                                          <p:spTgt spid="31">
-                                            <p:txEl>
-                                              <p:pRg st="0" end="0"/>
-                                            </p:txEl>
-                                          </p:spTgt>
-                                        </p:tgtEl>
-                                        <p:attrNameLst>
-                                          <p:attrName>style.visibility</p:attrName>
-                                        </p:attrNameLst>
-                                      </p:cBhvr>
-                                      <p:to>
-                                        <p:strVal val="visible"/>
-                                      </p:to>
-                                    </p:set>
-                                    <p:anim calcmode="lin" valueType="num">
-                                      <p:cBhvr additive="base">
-                                        <p:cTn id="20" dur="500"/>
-                                        <p:tgtEl>
-                                          <p:spTgt spid="31">
-                                            <p:txEl>
-                                              <p:pRg st="0" end="0"/>
-                                            </p:txEl>
-                                          </p:spTgt>
-                                        </p:tgtEl>
-                                        <p:attrNameLst>
-                                          <p:attrName>ppt_y</p:attrName>
-                                        </p:attrNameLst>
-                                      </p:cBhvr>
-                                      <p:tavLst>
-                                        <p:tav tm="0">
-                                          <p:val>
-                                            <p:strVal val="#ppt_y+#ppt_h*1.125000"/>
-                                          </p:val>
-                                        </p:tav>
-                                        <p:tav tm="100000">
-                                          <p:val>
-                                            <p:strVal val="#ppt_y"/>
-                                          </p:val>
-                                        </p:tav>
-                                      </p:tavLst>
-                                    </p:anim>
-                                    <p:animEffect transition="in" filter="wipe(up)">
-                                      <p:cBhvr>
-                                        <p:cTn id="21" dur="500"/>
-                                        <p:tgtEl>
-                                          <p:spTgt spid="31">
-                                            <p:txEl>
-                                              <p:pRg st="0" end="0"/>
-                                            </p:txEl>
-                                          </p:spTgt>
-                                        </p:tgtEl>
-                                      </p:cBhvr>
-                                    </p:animEffect>
-                                  </p:childTnLst>
-                                </p:cTn>
-                              </p:par>
-                            </p:childTnLst>
-                          </p:cTn>
-                        </p:par>
-                      </p:childTnLst>
-                    </p:cTn>
-                  </p:par>
-                  <p:par>
-                    <p:cTn id="22" fill="hold">
-                      <p:stCondLst>
-                        <p:cond delay="indefinite"/>
-                      </p:stCondLst>
-                      <p:childTnLst>
-                        <p:par>
-                          <p:cTn id="23" fill="hold">
-                            <p:stCondLst>
-                              <p:cond delay="0"/>
-                            </p:stCondLst>
-                            <p:childTnLst>
-                              <p:par>
-                                <p:cTn id="24" presetID="12" presetClass="entr" presetSubtype="4" fill="hold" grpId="0" nodeType="clickEffect" nodePh="1">
-                                  <p:stCondLst>
-                                    <p:cond delay="0"/>
-                                  </p:stCondLst>
-                                  <p:endCondLst>
-                                    <p:cond evt="begin" delay="0">
-                                      <p:tn val="24"/>
-                                    </p:cond>
-                                  </p:endCondLst>
-                                  <p:childTnLst>
-                                    <p:set>
-                                      <p:cBhvr>
-                                        <p:cTn id="25" dur="1" fill="hold">
-                                          <p:stCondLst>
-                                            <p:cond delay="0"/>
-                                          </p:stCondLst>
-                                        </p:cTn>
-                                        <p:tgtEl>
-                                          <p:spTgt spid="20"/>
-                                        </p:tgtEl>
-                                        <p:attrNameLst>
-                                          <p:attrName>style.visibility</p:attrName>
-                                        </p:attrNameLst>
-                                      </p:cBhvr>
-                                      <p:to>
-                                        <p:strVal val="visible"/>
-                                      </p:to>
-                                    </p:set>
-                                    <p:anim calcmode="lin" valueType="num">
-                                      <p:cBhvr additive="base">
-                                        <p:cTn id="26" dur="500"/>
-                                        <p:tgtEl>
-                                          <p:spTgt spid="20"/>
-                                        </p:tgtEl>
-                                        <p:attrNameLst>
-                                          <p:attrName>ppt_y</p:attrName>
-                                        </p:attrNameLst>
-                                      </p:cBhvr>
-                                      <p:tavLst>
-                                        <p:tav tm="0">
-                                          <p:val>
-                                            <p:strVal val="#ppt_y+#ppt_h*1.125000"/>
-                                          </p:val>
-                                        </p:tav>
-                                        <p:tav tm="100000">
-                                          <p:val>
-                                            <p:strVal val="#ppt_y"/>
-                                          </p:val>
-                                        </p:tav>
-                                      </p:tavLst>
-                                    </p:anim>
-                                    <p:animEffect transition="in" filter="wipe(up)">
-                                      <p:cBhvr>
-                                        <p:cTn id="27" dur="500"/>
-                                        <p:tgtEl>
-                                          <p:spTgt spid="20"/>
-                                        </p:tgtEl>
-                                      </p:cBhvr>
-                                    </p:animEffect>
-                                  </p:childTnLst>
-                                </p:cTn>
-                              </p:par>
-                            </p:childTnLst>
-                          </p:cTn>
-                        </p:par>
-                      </p:childTnLst>
-                    </p:cTn>
-                  </p:par>
-                  <p:par>
-                    <p:cTn id="28" fill="hold">
-                      <p:stCondLst>
-                        <p:cond delay="indefinite"/>
-                      </p:stCondLst>
-                      <p:childTnLst>
-                        <p:par>
-                          <p:cTn id="29" fill="hold">
-                            <p:stCondLst>
-                              <p:cond delay="0"/>
-                            </p:stCondLst>
-                            <p:childTnLst>
-                              <p:par>
-                                <p:cTn id="30" presetID="12" presetClass="entr" presetSubtype="4" fill="hold" grpId="0" nodeType="clickEffect" nodePh="1">
-                                  <p:stCondLst>
-                                    <p:cond delay="0"/>
-                                  </p:stCondLst>
-                                  <p:endCondLst>
-                                    <p:cond evt="begin" delay="0">
-                                      <p:tn val="30"/>
-                                    </p:cond>
-                                  </p:endCondLst>
-                                  <p:childTnLst>
-                                    <p:set>
-                                      <p:cBhvr>
-                                        <p:cTn id="31" dur="1" fill="hold">
-                                          <p:stCondLst>
-                                            <p:cond delay="0"/>
-                                          </p:stCondLst>
-                                        </p:cTn>
-                                        <p:tgtEl>
-                                          <p:spTgt spid="30"/>
-                                        </p:tgtEl>
-                                        <p:attrNameLst>
-                                          <p:attrName>style.visibility</p:attrName>
-                                        </p:attrNameLst>
-                                      </p:cBhvr>
-                                      <p:to>
-                                        <p:strVal val="visible"/>
-                                      </p:to>
-                                    </p:set>
-                                    <p:anim calcmode="lin" valueType="num">
-                                      <p:cBhvr additive="base">
-                                        <p:cTn id="32" dur="500"/>
-                                        <p:tgtEl>
-                                          <p:spTgt spid="30"/>
-                                        </p:tgtEl>
-                                        <p:attrNameLst>
-                                          <p:attrName>ppt_y</p:attrName>
-                                        </p:attrNameLst>
-                                      </p:cBhvr>
-                                      <p:tavLst>
-                                        <p:tav tm="0">
-                                          <p:val>
-                                            <p:strVal val="#ppt_y+#ppt_h*1.125000"/>
-                                          </p:val>
-                                        </p:tav>
-                                        <p:tav tm="100000">
-                                          <p:val>
-                                            <p:strVal val="#ppt_y"/>
-                                          </p:val>
-                                        </p:tav>
-                                      </p:tavLst>
-                                    </p:anim>
-                                    <p:animEffect transition="in" filter="wipe(up)">
-                                      <p:cBhvr>
-                                        <p:cTn id="33" dur="500"/>
-                                        <p:tgtEl>
-                                          <p:spTgt spid="30"/>
-                                        </p:tgtEl>
-                                      </p:cBhvr>
-                                    </p:animEffect>
-                                  </p:childTnLst>
-                                </p:cTn>
-                              </p:par>
-                            </p:childTnLst>
-                          </p:cTn>
-                        </p:par>
-                      </p:childTnLst>
-                    </p:cTn>
-                  </p:par>
-                  <p:par>
-                    <p:cTn id="34" fill="hold">
-                      <p:stCondLst>
-                        <p:cond delay="indefinite"/>
-                      </p:stCondLst>
-                      <p:childTnLst>
-                        <p:par>
-                          <p:cTn id="35" fill="hold">
-                            <p:stCondLst>
-                              <p:cond delay="0"/>
-                            </p:stCondLst>
-                            <p:childTnLst>
-                              <p:par>
-                                <p:cTn id="36" presetID="12" presetClass="entr" presetSubtype="4" fill="hold" grpId="0" nodeType="clickEffect" nodePh="1">
-                                  <p:stCondLst>
-                                    <p:cond delay="0"/>
-                                  </p:stCondLst>
-                                  <p:endCondLst>
-                                    <p:cond evt="begin" delay="0">
-                                      <p:tn val="36"/>
-                                    </p:cond>
-                                  </p:endCondLst>
-                                  <p:childTnLst>
-                                    <p:set>
-                                      <p:cBhvr>
-                                        <p:cTn id="37" dur="1" fill="hold">
-                                          <p:stCondLst>
-                                            <p:cond delay="0"/>
-                                          </p:stCondLst>
-                                        </p:cTn>
-                                        <p:tgtEl>
-                                          <p:spTgt spid="23"/>
-                                        </p:tgtEl>
-                                        <p:attrNameLst>
-                                          <p:attrName>style.visibility</p:attrName>
-                                        </p:attrNameLst>
-                                      </p:cBhvr>
-                                      <p:to>
-                                        <p:strVal val="visible"/>
-                                      </p:to>
-                                    </p:set>
-                                    <p:anim calcmode="lin" valueType="num">
-                                      <p:cBhvr additive="base">
-                                        <p:cTn id="38" dur="500"/>
-                                        <p:tgtEl>
-                                          <p:spTgt spid="23"/>
-                                        </p:tgtEl>
-                                        <p:attrNameLst>
-                                          <p:attrName>ppt_y</p:attrName>
-                                        </p:attrNameLst>
-                                      </p:cBhvr>
-                                      <p:tavLst>
-                                        <p:tav tm="0">
-                                          <p:val>
-                                            <p:strVal val="#ppt_y+#ppt_h*1.125000"/>
-                                          </p:val>
-                                        </p:tav>
-                                        <p:tav tm="100000">
-                                          <p:val>
-                                            <p:strVal val="#ppt_y"/>
-                                          </p:val>
-                                        </p:tav>
-                                      </p:tavLst>
-                                    </p:anim>
-                                    <p:animEffect transition="in" filter="wipe(up)">
-                                      <p:cBhvr>
-                                        <p:cTn id="39" dur="500"/>
-                                        <p:tgtEl>
-                                          <p:spTgt spid="23"/>
-                                        </p:tgtEl>
-                                      </p:cBhvr>
-                                    </p:animEffect>
-                                  </p:childTnLst>
-                                </p:cTn>
-                              </p:par>
-                            </p:childTnLst>
-                          </p:cTn>
-                        </p:par>
-                      </p:childTnLst>
-                    </p:cTn>
-                  </p:par>
-                  <p:par>
-                    <p:cTn id="40" fill="hold">
-                      <p:stCondLst>
-                        <p:cond delay="indefinite"/>
-                      </p:stCondLst>
-                      <p:childTnLst>
-                        <p:par>
-                          <p:cTn id="41" fill="hold">
-                            <p:stCondLst>
-                              <p:cond delay="0"/>
-                            </p:stCondLst>
-                            <p:childTnLst>
-                              <p:par>
-                                <p:cTn id="42" presetID="12" presetClass="entr" presetSubtype="4" fill="hold" grpId="0" nodeType="clickEffect">
-                                  <p:stCondLst>
-                                    <p:cond delay="0"/>
-                                  </p:stCondLst>
-                                  <p:childTnLst>
-                                    <p:set>
-                                      <p:cBhvr>
-                                        <p:cTn id="43" dur="1" fill="hold">
-                                          <p:stCondLst>
-                                            <p:cond delay="0"/>
-                                          </p:stCondLst>
-                                        </p:cTn>
-                                        <p:tgtEl>
-                                          <p:spTgt spid="32"/>
-                                        </p:tgtEl>
-                                        <p:attrNameLst>
-                                          <p:attrName>style.visibility</p:attrName>
-                                        </p:attrNameLst>
-                                      </p:cBhvr>
-                                      <p:to>
-                                        <p:strVal val="visible"/>
-                                      </p:to>
-                                    </p:set>
-                                    <p:anim calcmode="lin" valueType="num">
-                                      <p:cBhvr additive="base">
-                                        <p:cTn id="44" dur="500"/>
-                                        <p:tgtEl>
-                                          <p:spTgt spid="32"/>
-                                        </p:tgtEl>
-                                        <p:attrNameLst>
-                                          <p:attrName>ppt_y</p:attrName>
-                                        </p:attrNameLst>
-                                      </p:cBhvr>
-                                      <p:tavLst>
-                                        <p:tav tm="0">
-                                          <p:val>
-                                            <p:strVal val="#ppt_y+#ppt_h*1.125000"/>
-                                          </p:val>
-                                        </p:tav>
-                                        <p:tav tm="100000">
-                                          <p:val>
-                                            <p:strVal val="#ppt_y"/>
-                                          </p:val>
-                                        </p:tav>
-                                      </p:tavLst>
-                                    </p:anim>
-                                    <p:animEffect transition="in" filter="wipe(up)">
-                                      <p:cBhvr>
-                                        <p:cTn id="45" dur="500"/>
-                                        <p:tgtEl>
-                                          <p:spTgt spid="32"/>
-                                        </p:tgtEl>
-                                      </p:cBhvr>
-                                    </p:animEffect>
-                                  </p:childTnLst>
-                                </p:cTn>
-                              </p:par>
-                            </p:childTnLst>
-                          </p:cTn>
-                        </p:par>
-                      </p:childTnLst>
-                    </p:cTn>
-                  </p:par>
-                </p:childTnLst>
-              </p:cTn>
-              <p:prevCondLst>
-                <p:cond evt="onPrev" delay="0">
-                  <p:tgtEl>
-                    <p:sldTgt/>
-                  </p:tgtEl>
-                </p:cond>
-              </p:prevCondLst>
-              <p:nextCondLst>
-                <p:cond evt="onNext" delay="0">
-                  <p:tgtEl>
-                    <p:sldTgt/>
-                  </p:tgtEl>
-                </p:cond>
-              </p:nextCondLst>
-            </p:seq>
-          </p:childTnLst>
-        </p:cTn>
-      </p:par>
-    </p:tnLst>
-    <p:bldLst>
-      <p:bldP spid="3" grpId="0"/>
-      <p:bldP spid="31" grpId="0" build="p"/>
-      <p:bldP spid="17" grpId="0"/>
-      <p:bldP spid="20" grpId="0"/>
-      <p:bldP spid="23" grpId="0"/>
-      <p:bldP spid="30" grpId="0"/>
-      <p:bldP spid="32" grpId="0"/>
-    </p:bldLst>
-  </p:timing>
 </p:sld>
 </file>
 
@@ -14218,7 +11865,7 @@
         </p:spPr>
         <p:txBody>
           <a:bodyPr vert="horz" lIns="91440" tIns="45720" rIns="91440" bIns="45720" rtlCol="0" anchor="t">
-            <a:normAutofit fontScale="70000" lnSpcReduction="20000"/>
+            <a:normAutofit/>
           </a:bodyPr>
           <a:lstStyle/>
           <a:p>
@@ -14228,20 +11875,8 @@
               </a:lnSpc>
             </a:pPr>
             <a:r>
-              <a:rPr sz="1700" b="0"/>
-              <a:t>Agricultural performance changes with season because weather, soil conditions, water use, crop choice and market conditions are not constant.</a:t>
-            </a:r>
-            <a:br/>
-            <a:br/>
-            <a:r>
-              <a:rPr sz="1700" b="0"/>
-              <a:t>This project uses the provided agricultural dataset to compare Kharif, Rabi and Zaid seasons and identify meaningful differences in yield, production, profitability, water efficiency, risk and resource use.</a:t>
-            </a:r>
-            <a:br/>
-            <a:br/>
-            <a:r>
-              <a:rPr sz="1700" b="0"/>
-              <a:t>The analysis combines data cleaning, exploratory analysis, visualization, correlation and statistical testing to turn the raw records into evidence-based findings.</a:t>
+              <a:rPr lang="en-US" sz="1800" dirty="0"/>
+              <a:t>Agricultural activities are influenced by seasonal variations in environmental conditions, farming practices, resource availability and market conditions. As a result, agricultural performance may differ from one season to another. However, raw agricultural data does not clearly explain how agricultural performance changes across seasons or what patterns can be observed in different seasonal conditions. The problem is to analyze the given agricultural dataset and investigate seasonal differences in agricultural performance by identifying meaningful patterns, trends, relationships and variations within the available data.</a:t>
             </a:r>
             <a:endParaRPr lang="en-IN" sz="2800" dirty="0"/>
           </a:p>
@@ -14271,7 +11906,7 @@
         </p:spPr>
         <p:txBody>
           <a:bodyPr>
-            <a:normAutofit fontScale="90000"/>
+            <a:normAutofit/>
           </a:bodyPr>
           <a:lstStyle/>
           <a:p>
@@ -14654,7 +12289,7 @@
         </p:spPr>
         <p:txBody>
           <a:bodyPr>
-            <a:normAutofit fontScale="90000"/>
+            <a:normAutofit/>
           </a:bodyPr>
           <a:lstStyle/>
           <a:p>
@@ -15094,7 +12729,7 @@
           </a:fontRef>
         </p:style>
         <p:txBody>
-          <a:bodyPr rtlCol="0" anchor="ctr" lIns="109728" rIns="109728" tIns="73152"/>
+          <a:bodyPr lIns="109728" tIns="73152" rIns="109728" rtlCol="0" anchor="ctr"/>
           <a:lstStyle/>
           <a:p>
             <a:pPr algn="l"/>
@@ -15189,7 +12824,7 @@
           </a:fontRef>
         </p:style>
         <p:txBody>
-          <a:bodyPr rtlCol="0" anchor="ctr" lIns="109728" rIns="109728" tIns="73152"/>
+          <a:bodyPr lIns="109728" tIns="73152" rIns="109728" rtlCol="0" anchor="ctr"/>
           <a:lstStyle/>
           <a:p>
             <a:pPr algn="l"/>
@@ -15284,7 +12919,7 @@
           </a:fontRef>
         </p:style>
         <p:txBody>
-          <a:bodyPr rtlCol="0" anchor="ctr" lIns="109728" rIns="109728" tIns="73152"/>
+          <a:bodyPr lIns="109728" tIns="73152" rIns="109728" rtlCol="0" anchor="ctr"/>
           <a:lstStyle/>
           <a:p>
             <a:pPr algn="l"/>
@@ -15351,259 +12986,6 @@
   <p:clrMapOvr>
     <a:masterClrMapping/>
   </p:clrMapOvr>
-  <p:timing>
-    <p:tnLst>
-      <p:par>
-        <p:cTn id="1" dur="indefinite" restart="never" nodeType="tmRoot">
-          <p:childTnLst>
-            <p:seq concurrent="1" nextAc="seek">
-              <p:cTn id="2" dur="indefinite" nodeType="mainSeq">
-                <p:childTnLst>
-                  <p:par>
-                    <p:cTn id="3" fill="hold">
-                      <p:stCondLst>
-                        <p:cond delay="indefinite"/>
-                      </p:stCondLst>
-                      <p:childTnLst>
-                        <p:par>
-                          <p:cTn id="4" fill="hold">
-                            <p:stCondLst>
-                              <p:cond delay="0"/>
-                            </p:stCondLst>
-                            <p:childTnLst>
-                              <p:par>
-                                <p:cTn id="5" presetID="53" presetClass="entr" presetSubtype="16" fill="hold" grpId="0" nodeType="clickEffect">
-                                  <p:stCondLst>
-                                    <p:cond delay="0"/>
-                                  </p:stCondLst>
-                                  <p:childTnLst>
-                                    <p:set>
-                                      <p:cBhvr>
-                                        <p:cTn id="6" dur="1" fill="hold">
-                                          <p:stCondLst>
-                                            <p:cond delay="0"/>
-                                          </p:stCondLst>
-                                        </p:cTn>
-                                        <p:tgtEl>
-                                          <p:spTgt spid="4"/>
-                                        </p:tgtEl>
-                                        <p:attrNameLst>
-                                          <p:attrName>style.visibility</p:attrName>
-                                        </p:attrNameLst>
-                                      </p:cBhvr>
-                                      <p:to>
-                                        <p:strVal val="visible"/>
-                                      </p:to>
-                                    </p:set>
-                                    <p:anim calcmode="lin" valueType="num">
-                                      <p:cBhvr>
-                                        <p:cTn id="7" dur="500" fill="hold"/>
-                                        <p:tgtEl>
-                                          <p:spTgt spid="4"/>
-                                        </p:tgtEl>
-                                        <p:attrNameLst>
-                                          <p:attrName>ppt_w</p:attrName>
-                                        </p:attrNameLst>
-                                      </p:cBhvr>
-                                      <p:tavLst>
-                                        <p:tav tm="0">
-                                          <p:val>
-                                            <p:fltVal val="0"/>
-                                          </p:val>
-                                        </p:tav>
-                                        <p:tav tm="100000">
-                                          <p:val>
-                                            <p:strVal val="#ppt_w"/>
-                                          </p:val>
-                                        </p:tav>
-                                      </p:tavLst>
-                                    </p:anim>
-                                    <p:anim calcmode="lin" valueType="num">
-                                      <p:cBhvr>
-                                        <p:cTn id="8" dur="500" fill="hold"/>
-                                        <p:tgtEl>
-                                          <p:spTgt spid="4"/>
-                                        </p:tgtEl>
-                                        <p:attrNameLst>
-                                          <p:attrName>ppt_h</p:attrName>
-                                        </p:attrNameLst>
-                                      </p:cBhvr>
-                                      <p:tavLst>
-                                        <p:tav tm="0">
-                                          <p:val>
-                                            <p:fltVal val="0"/>
-                                          </p:val>
-                                        </p:tav>
-                                        <p:tav tm="100000">
-                                          <p:val>
-                                            <p:strVal val="#ppt_h"/>
-                                          </p:val>
-                                        </p:tav>
-                                      </p:tavLst>
-                                    </p:anim>
-                                    <p:animEffect transition="in" filter="fade">
-                                      <p:cBhvr>
-                                        <p:cTn id="9" dur="500"/>
-                                        <p:tgtEl>
-                                          <p:spTgt spid="4"/>
-                                        </p:tgtEl>
-                                      </p:cBhvr>
-                                    </p:animEffect>
-                                  </p:childTnLst>
-                                </p:cTn>
-                              </p:par>
-                            </p:childTnLst>
-                          </p:cTn>
-                        </p:par>
-                      </p:childTnLst>
-                    </p:cTn>
-                  </p:par>
-                  <p:par>
-                    <p:cTn id="10" fill="hold">
-                      <p:stCondLst>
-                        <p:cond delay="indefinite"/>
-                      </p:stCondLst>
-                      <p:childTnLst>
-                        <p:par>
-                          <p:cTn id="11" fill="hold">
-                            <p:stCondLst>
-                              <p:cond delay="0"/>
-                            </p:stCondLst>
-                            <p:childTnLst>
-                              <p:par>
-                                <p:cTn id="12" presetID="42" presetClass="entr" presetSubtype="0" fill="hold" grpId="0" nodeType="clickEffect" nodePh="1">
-                                  <p:stCondLst>
-                                    <p:cond delay="0"/>
-                                  </p:stCondLst>
-                                  <p:endCondLst>
-                                    <p:cond evt="begin" delay="0">
-                                      <p:tn val="12"/>
-                                    </p:cond>
-                                  </p:endCondLst>
-                                  <p:childTnLst>
-                                    <p:set>
-                                      <p:cBhvr>
-                                        <p:cTn id="13" dur="1" fill="hold">
-                                          <p:stCondLst>
-                                            <p:cond delay="0"/>
-                                          </p:stCondLst>
-                                        </p:cTn>
-                                        <p:tgtEl>
-                                          <p:spTgt spid="2">
-                                            <p:txEl>
-                                              <p:pRg st="0" end="0"/>
-                                            </p:txEl>
-                                          </p:spTgt>
-                                        </p:tgtEl>
-                                        <p:attrNameLst>
-                                          <p:attrName>style.visibility</p:attrName>
-                                        </p:attrNameLst>
-                                      </p:cBhvr>
-                                      <p:to>
-                                        <p:strVal val="visible"/>
-                                      </p:to>
-                                    </p:set>
-                                    <p:animEffect transition="in" filter="fade">
-                                      <p:cBhvr>
-                                        <p:cTn id="14" dur="1000"/>
-                                        <p:tgtEl>
-                                          <p:spTgt spid="2">
-                                            <p:txEl>
-                                              <p:pRg st="0" end="0"/>
-                                            </p:txEl>
-                                          </p:spTgt>
-                                        </p:tgtEl>
-                                      </p:cBhvr>
-                                    </p:animEffect>
-                                    <p:anim calcmode="lin" valueType="num">
-                                      <p:cBhvr>
-                                        <p:cTn id="15" dur="1000" fill="hold"/>
-                                        <p:tgtEl>
-                                          <p:spTgt spid="2">
-                                            <p:txEl>
-                                              <p:pRg st="0" end="0"/>
-                                            </p:txEl>
-                                          </p:spTgt>
-                                        </p:tgtEl>
-                                        <p:attrNameLst>
-                                          <p:attrName>ppt_x</p:attrName>
-                                        </p:attrNameLst>
-                                      </p:cBhvr>
-                                      <p:tavLst>
-                                        <p:tav tm="0">
-                                          <p:val>
-                                            <p:strVal val="#ppt_x"/>
-                                          </p:val>
-                                        </p:tav>
-                                        <p:tav tm="100000">
-                                          <p:val>
-                                            <p:strVal val="#ppt_x"/>
-                                          </p:val>
-                                        </p:tav>
-                                      </p:tavLst>
-                                    </p:anim>
-                                    <p:anim calcmode="lin" valueType="num">
-                                      <p:cBhvr>
-                                        <p:cTn id="16" dur="1000" fill="hold"/>
-                                        <p:tgtEl>
-                                          <p:spTgt spid="2">
-                                            <p:txEl>
-                                              <p:pRg st="0" end="0"/>
-                                            </p:txEl>
-                                          </p:spTgt>
-                                        </p:tgtEl>
-                                        <p:attrNameLst>
-                                          <p:attrName>ppt_y</p:attrName>
-                                        </p:attrNameLst>
-                                      </p:cBhvr>
-                                      <p:tavLst>
-                                        <p:tav tm="0">
-                                          <p:val>
-                                            <p:strVal val="#ppt_y+.1"/>
-                                          </p:val>
-                                        </p:tav>
-                                        <p:tav tm="100000">
-                                          <p:val>
-                                            <p:strVal val="#ppt_y"/>
-                                          </p:val>
-                                        </p:tav>
-                                      </p:tavLst>
-                                    </p:anim>
-                                  </p:childTnLst>
-                                </p:cTn>
-                              </p:par>
-                            </p:childTnLst>
-                          </p:cTn>
-                        </p:par>
-                      </p:childTnLst>
-                    </p:cTn>
-                  </p:par>
-                </p:childTnLst>
-              </p:cTn>
-              <p:prevCondLst>
-                <p:cond evt="onPrev" delay="0">
-                  <p:tgtEl>
-                    <p:sldTgt/>
-                  </p:tgtEl>
-                </p:cond>
-              </p:prevCondLst>
-              <p:nextCondLst>
-                <p:cond evt="onNext" delay="0">
-                  <p:tgtEl>
-                    <p:sldTgt/>
-                  </p:tgtEl>
-                </p:cond>
-              </p:nextCondLst>
-            </p:seq>
-          </p:childTnLst>
-        </p:cTn>
-      </p:par>
-    </p:tnLst>
-    <p:bldLst>
-      <p:bldP spid="2" grpId="0" build="p"/>
-      <p:bldP spid="4" grpId="0"/>
-    </p:bldLst>
-  </p:timing>
 </p:sld>
 </file>
 
@@ -15767,7 +13149,7 @@
           </a:fontRef>
         </p:style>
         <p:txBody>
-          <a:bodyPr rtlCol="0" anchor="ctr" lIns="109728" rIns="109728" tIns="73152"/>
+          <a:bodyPr lIns="109728" tIns="73152" rIns="109728" rtlCol="0" anchor="ctr"/>
           <a:lstStyle/>
           <a:p>
             <a:pPr algn="l"/>
@@ -15831,7 +13213,7 @@
           </a:fontRef>
         </p:style>
         <p:txBody>
-          <a:bodyPr rtlCol="0" anchor="ctr" lIns="109728" rIns="109728" tIns="73152"/>
+          <a:bodyPr lIns="109728" tIns="73152" rIns="109728" rtlCol="0" anchor="ctr"/>
           <a:lstStyle/>
           <a:p>
             <a:pPr algn="l"/>
@@ -15895,7 +13277,7 @@
           </a:fontRef>
         </p:style>
         <p:txBody>
-          <a:bodyPr rtlCol="0" anchor="ctr" lIns="109728" rIns="109728" tIns="73152"/>
+          <a:bodyPr lIns="109728" tIns="73152" rIns="109728" rtlCol="0" anchor="ctr"/>
           <a:lstStyle/>
           <a:p>
             <a:pPr algn="l"/>
@@ -15959,7 +13341,7 @@
           </a:fontRef>
         </p:style>
         <p:txBody>
-          <a:bodyPr rtlCol="0" anchor="ctr" lIns="109728" rIns="109728" tIns="73152"/>
+          <a:bodyPr lIns="109728" tIns="73152" rIns="109728" rtlCol="0" anchor="ctr"/>
           <a:lstStyle/>
           <a:p>
             <a:pPr algn="l"/>
@@ -16023,7 +13405,7 @@
           </a:fontRef>
         </p:style>
         <p:txBody>
-          <a:bodyPr rtlCol="0" anchor="ctr" lIns="109728" rIns="109728" tIns="73152"/>
+          <a:bodyPr lIns="109728" tIns="73152" rIns="109728" rtlCol="0" anchor="ctr"/>
           <a:lstStyle/>
           <a:p>
             <a:pPr algn="l"/>
@@ -16087,7 +13469,7 @@
           </a:fontRef>
         </p:style>
         <p:txBody>
-          <a:bodyPr rtlCol="0" anchor="ctr" lIns="109728" rIns="109728" tIns="73152"/>
+          <a:bodyPr lIns="109728" tIns="73152" rIns="109728" rtlCol="0" anchor="ctr"/>
           <a:lstStyle/>
           <a:p>
             <a:pPr algn="l"/>
@@ -16151,7 +13533,7 @@
           </a:fontRef>
         </p:style>
         <p:txBody>
-          <a:bodyPr rtlCol="0" anchor="ctr" lIns="109728" rIns="109728" tIns="73152"/>
+          <a:bodyPr lIns="109728" tIns="73152" rIns="109728" rtlCol="0" anchor="ctr"/>
           <a:lstStyle/>
           <a:p>
             <a:pPr algn="l"/>
@@ -16187,259 +13569,6 @@
   <p:clrMapOvr>
     <a:masterClrMapping/>
   </p:clrMapOvr>
-  <p:timing>
-    <p:tnLst>
-      <p:par>
-        <p:cTn id="1" dur="indefinite" restart="never" nodeType="tmRoot">
-          <p:childTnLst>
-            <p:seq concurrent="1" nextAc="seek">
-              <p:cTn id="2" dur="indefinite" nodeType="mainSeq">
-                <p:childTnLst>
-                  <p:par>
-                    <p:cTn id="3" fill="hold">
-                      <p:stCondLst>
-                        <p:cond delay="indefinite"/>
-                      </p:stCondLst>
-                      <p:childTnLst>
-                        <p:par>
-                          <p:cTn id="4" fill="hold">
-                            <p:stCondLst>
-                              <p:cond delay="0"/>
-                            </p:stCondLst>
-                            <p:childTnLst>
-                              <p:par>
-                                <p:cTn id="5" presetID="53" presetClass="entr" presetSubtype="16" fill="hold" grpId="0" nodeType="clickEffect">
-                                  <p:stCondLst>
-                                    <p:cond delay="0"/>
-                                  </p:stCondLst>
-                                  <p:childTnLst>
-                                    <p:set>
-                                      <p:cBhvr>
-                                        <p:cTn id="6" dur="1" fill="hold">
-                                          <p:stCondLst>
-                                            <p:cond delay="0"/>
-                                          </p:stCondLst>
-                                        </p:cTn>
-                                        <p:tgtEl>
-                                          <p:spTgt spid="9"/>
-                                        </p:tgtEl>
-                                        <p:attrNameLst>
-                                          <p:attrName>style.visibility</p:attrName>
-                                        </p:attrNameLst>
-                                      </p:cBhvr>
-                                      <p:to>
-                                        <p:strVal val="visible"/>
-                                      </p:to>
-                                    </p:set>
-                                    <p:anim calcmode="lin" valueType="num">
-                                      <p:cBhvr>
-                                        <p:cTn id="7" dur="500" fill="hold"/>
-                                        <p:tgtEl>
-                                          <p:spTgt spid="9"/>
-                                        </p:tgtEl>
-                                        <p:attrNameLst>
-                                          <p:attrName>ppt_w</p:attrName>
-                                        </p:attrNameLst>
-                                      </p:cBhvr>
-                                      <p:tavLst>
-                                        <p:tav tm="0">
-                                          <p:val>
-                                            <p:fltVal val="0"/>
-                                          </p:val>
-                                        </p:tav>
-                                        <p:tav tm="100000">
-                                          <p:val>
-                                            <p:strVal val="#ppt_w"/>
-                                          </p:val>
-                                        </p:tav>
-                                      </p:tavLst>
-                                    </p:anim>
-                                    <p:anim calcmode="lin" valueType="num">
-                                      <p:cBhvr>
-                                        <p:cTn id="8" dur="500" fill="hold"/>
-                                        <p:tgtEl>
-                                          <p:spTgt spid="9"/>
-                                        </p:tgtEl>
-                                        <p:attrNameLst>
-                                          <p:attrName>ppt_h</p:attrName>
-                                        </p:attrNameLst>
-                                      </p:cBhvr>
-                                      <p:tavLst>
-                                        <p:tav tm="0">
-                                          <p:val>
-                                            <p:fltVal val="0"/>
-                                          </p:val>
-                                        </p:tav>
-                                        <p:tav tm="100000">
-                                          <p:val>
-                                            <p:strVal val="#ppt_h"/>
-                                          </p:val>
-                                        </p:tav>
-                                      </p:tavLst>
-                                    </p:anim>
-                                    <p:animEffect transition="in" filter="fade">
-                                      <p:cBhvr>
-                                        <p:cTn id="9" dur="500"/>
-                                        <p:tgtEl>
-                                          <p:spTgt spid="9"/>
-                                        </p:tgtEl>
-                                      </p:cBhvr>
-                                    </p:animEffect>
-                                  </p:childTnLst>
-                                </p:cTn>
-                              </p:par>
-                            </p:childTnLst>
-                          </p:cTn>
-                        </p:par>
-                      </p:childTnLst>
-                    </p:cTn>
-                  </p:par>
-                  <p:par>
-                    <p:cTn id="10" fill="hold">
-                      <p:stCondLst>
-                        <p:cond delay="indefinite"/>
-                      </p:stCondLst>
-                      <p:childTnLst>
-                        <p:par>
-                          <p:cTn id="11" fill="hold">
-                            <p:stCondLst>
-                              <p:cond delay="0"/>
-                            </p:stCondLst>
-                            <p:childTnLst>
-                              <p:par>
-                                <p:cTn id="12" presetID="42" presetClass="entr" presetSubtype="0" fill="hold" grpId="0" nodeType="clickEffect" nodePh="1">
-                                  <p:stCondLst>
-                                    <p:cond delay="0"/>
-                                  </p:stCondLst>
-                                  <p:endCondLst>
-                                    <p:cond evt="begin" delay="0">
-                                      <p:tn val="12"/>
-                                    </p:cond>
-                                  </p:endCondLst>
-                                  <p:childTnLst>
-                                    <p:set>
-                                      <p:cBhvr>
-                                        <p:cTn id="13" dur="1" fill="hold">
-                                          <p:stCondLst>
-                                            <p:cond delay="0"/>
-                                          </p:stCondLst>
-                                        </p:cTn>
-                                        <p:tgtEl>
-                                          <p:spTgt spid="7">
-                                            <p:txEl>
-                                              <p:pRg st="0" end="0"/>
-                                            </p:txEl>
-                                          </p:spTgt>
-                                        </p:tgtEl>
-                                        <p:attrNameLst>
-                                          <p:attrName>style.visibility</p:attrName>
-                                        </p:attrNameLst>
-                                      </p:cBhvr>
-                                      <p:to>
-                                        <p:strVal val="visible"/>
-                                      </p:to>
-                                    </p:set>
-                                    <p:animEffect transition="in" filter="fade">
-                                      <p:cBhvr>
-                                        <p:cTn id="14" dur="1000"/>
-                                        <p:tgtEl>
-                                          <p:spTgt spid="7">
-                                            <p:txEl>
-                                              <p:pRg st="0" end="0"/>
-                                            </p:txEl>
-                                          </p:spTgt>
-                                        </p:tgtEl>
-                                      </p:cBhvr>
-                                    </p:animEffect>
-                                    <p:anim calcmode="lin" valueType="num">
-                                      <p:cBhvr>
-                                        <p:cTn id="15" dur="1000" fill="hold"/>
-                                        <p:tgtEl>
-                                          <p:spTgt spid="7">
-                                            <p:txEl>
-                                              <p:pRg st="0" end="0"/>
-                                            </p:txEl>
-                                          </p:spTgt>
-                                        </p:tgtEl>
-                                        <p:attrNameLst>
-                                          <p:attrName>ppt_x</p:attrName>
-                                        </p:attrNameLst>
-                                      </p:cBhvr>
-                                      <p:tavLst>
-                                        <p:tav tm="0">
-                                          <p:val>
-                                            <p:strVal val="#ppt_x"/>
-                                          </p:val>
-                                        </p:tav>
-                                        <p:tav tm="100000">
-                                          <p:val>
-                                            <p:strVal val="#ppt_x"/>
-                                          </p:val>
-                                        </p:tav>
-                                      </p:tavLst>
-                                    </p:anim>
-                                    <p:anim calcmode="lin" valueType="num">
-                                      <p:cBhvr>
-                                        <p:cTn id="16" dur="1000" fill="hold"/>
-                                        <p:tgtEl>
-                                          <p:spTgt spid="7">
-                                            <p:txEl>
-                                              <p:pRg st="0" end="0"/>
-                                            </p:txEl>
-                                          </p:spTgt>
-                                        </p:tgtEl>
-                                        <p:attrNameLst>
-                                          <p:attrName>ppt_y</p:attrName>
-                                        </p:attrNameLst>
-                                      </p:cBhvr>
-                                      <p:tavLst>
-                                        <p:tav tm="0">
-                                          <p:val>
-                                            <p:strVal val="#ppt_y+.1"/>
-                                          </p:val>
-                                        </p:tav>
-                                        <p:tav tm="100000">
-                                          <p:val>
-                                            <p:strVal val="#ppt_y"/>
-                                          </p:val>
-                                        </p:tav>
-                                      </p:tavLst>
-                                    </p:anim>
-                                  </p:childTnLst>
-                                </p:cTn>
-                              </p:par>
-                            </p:childTnLst>
-                          </p:cTn>
-                        </p:par>
-                      </p:childTnLst>
-                    </p:cTn>
-                  </p:par>
-                </p:childTnLst>
-              </p:cTn>
-              <p:prevCondLst>
-                <p:cond evt="onPrev" delay="0">
-                  <p:tgtEl>
-                    <p:sldTgt/>
-                  </p:tgtEl>
-                </p:cond>
-              </p:prevCondLst>
-              <p:nextCondLst>
-                <p:cond evt="onNext" delay="0">
-                  <p:tgtEl>
-                    <p:sldTgt/>
-                  </p:tgtEl>
-                </p:cond>
-              </p:nextCondLst>
-            </p:seq>
-          </p:childTnLst>
-        </p:cTn>
-      </p:par>
-    </p:tnLst>
-    <p:bldLst>
-      <p:bldP spid="7" grpId="0" build="p"/>
-      <p:bldP spid="9" grpId="0"/>
-    </p:bldLst>
-  </p:timing>
 </p:sld>
 </file>
 
@@ -16563,7 +13692,7 @@
           </a:fontRef>
         </p:style>
         <p:txBody>
-          <a:bodyPr rtlCol="0" anchor="ctr" lIns="109728" rIns="109728" tIns="73152"/>
+          <a:bodyPr lIns="109728" tIns="73152" rIns="109728" rtlCol="0" anchor="ctr"/>
           <a:lstStyle/>
           <a:p>
             <a:pPr algn="ctr"/>
@@ -16627,7 +13756,7 @@
           </a:fontRef>
         </p:style>
         <p:txBody>
-          <a:bodyPr rtlCol="0" anchor="ctr" lIns="109728" rIns="109728" tIns="73152"/>
+          <a:bodyPr lIns="109728" tIns="73152" rIns="109728" rtlCol="0" anchor="ctr"/>
           <a:lstStyle/>
           <a:p>
             <a:pPr algn="ctr"/>
@@ -16691,7 +13820,7 @@
           </a:fontRef>
         </p:style>
         <p:txBody>
-          <a:bodyPr rtlCol="0" anchor="ctr" lIns="109728" rIns="109728" tIns="73152"/>
+          <a:bodyPr lIns="109728" tIns="73152" rIns="109728" rtlCol="0" anchor="ctr"/>
           <a:lstStyle/>
           <a:p>
             <a:pPr algn="ctr"/>
@@ -16810,348 +13939,6 @@
   <p:clrMapOvr>
     <a:masterClrMapping/>
   </p:clrMapOvr>
-  <p:timing>
-    <p:tnLst>
-      <p:par>
-        <p:cTn id="1" dur="indefinite" restart="never" nodeType="tmRoot">
-          <p:childTnLst>
-            <p:seq concurrent="1" nextAc="seek">
-              <p:cTn id="2" dur="indefinite" nodeType="mainSeq">
-                <p:childTnLst>
-                  <p:par>
-                    <p:cTn id="3" fill="hold">
-                      <p:stCondLst>
-                        <p:cond delay="indefinite"/>
-                      </p:stCondLst>
-                      <p:childTnLst>
-                        <p:par>
-                          <p:cTn id="4" fill="hold">
-                            <p:stCondLst>
-                              <p:cond delay="0"/>
-                            </p:stCondLst>
-                            <p:childTnLst>
-                              <p:par>
-                                <p:cTn id="5" presetID="53" presetClass="entr" presetSubtype="16" fill="hold" grpId="0" nodeType="clickEffect">
-                                  <p:stCondLst>
-                                    <p:cond delay="0"/>
-                                  </p:stCondLst>
-                                  <p:childTnLst>
-                                    <p:set>
-                                      <p:cBhvr>
-                                        <p:cTn id="6" dur="1" fill="hold">
-                                          <p:stCondLst>
-                                            <p:cond delay="0"/>
-                                          </p:stCondLst>
-                                        </p:cTn>
-                                        <p:tgtEl>
-                                          <p:spTgt spid="4"/>
-                                        </p:tgtEl>
-                                        <p:attrNameLst>
-                                          <p:attrName>style.visibility</p:attrName>
-                                        </p:attrNameLst>
-                                      </p:cBhvr>
-                                      <p:to>
-                                        <p:strVal val="visible"/>
-                                      </p:to>
-                                    </p:set>
-                                    <p:anim calcmode="lin" valueType="num">
-                                      <p:cBhvr>
-                                        <p:cTn id="7" dur="500" fill="hold"/>
-                                        <p:tgtEl>
-                                          <p:spTgt spid="4"/>
-                                        </p:tgtEl>
-                                        <p:attrNameLst>
-                                          <p:attrName>ppt_w</p:attrName>
-                                        </p:attrNameLst>
-                                      </p:cBhvr>
-                                      <p:tavLst>
-                                        <p:tav tm="0">
-                                          <p:val>
-                                            <p:fltVal val="0"/>
-                                          </p:val>
-                                        </p:tav>
-                                        <p:tav tm="100000">
-                                          <p:val>
-                                            <p:strVal val="#ppt_w"/>
-                                          </p:val>
-                                        </p:tav>
-                                      </p:tavLst>
-                                    </p:anim>
-                                    <p:anim calcmode="lin" valueType="num">
-                                      <p:cBhvr>
-                                        <p:cTn id="8" dur="500" fill="hold"/>
-                                        <p:tgtEl>
-                                          <p:spTgt spid="4"/>
-                                        </p:tgtEl>
-                                        <p:attrNameLst>
-                                          <p:attrName>ppt_h</p:attrName>
-                                        </p:attrNameLst>
-                                      </p:cBhvr>
-                                      <p:tavLst>
-                                        <p:tav tm="0">
-                                          <p:val>
-                                            <p:fltVal val="0"/>
-                                          </p:val>
-                                        </p:tav>
-                                        <p:tav tm="100000">
-                                          <p:val>
-                                            <p:strVal val="#ppt_h"/>
-                                          </p:val>
-                                        </p:tav>
-                                      </p:tavLst>
-                                    </p:anim>
-                                    <p:animEffect transition="in" filter="fade">
-                                      <p:cBhvr>
-                                        <p:cTn id="9" dur="500"/>
-                                        <p:tgtEl>
-                                          <p:spTgt spid="4"/>
-                                        </p:tgtEl>
-                                      </p:cBhvr>
-                                    </p:animEffect>
-                                  </p:childTnLst>
-                                </p:cTn>
-                              </p:par>
-                            </p:childTnLst>
-                          </p:cTn>
-                        </p:par>
-                      </p:childTnLst>
-                    </p:cTn>
-                  </p:par>
-                  <p:par>
-                    <p:cTn id="10" fill="hold">
-                      <p:stCondLst>
-                        <p:cond delay="indefinite"/>
-                      </p:stCondLst>
-                      <p:childTnLst>
-                        <p:par>
-                          <p:cTn id="11" fill="hold">
-                            <p:stCondLst>
-                              <p:cond delay="0"/>
-                            </p:stCondLst>
-                            <p:childTnLst>
-                              <p:par>
-                                <p:cTn id="12" presetID="42" presetClass="entr" presetSubtype="0" fill="hold" grpId="0" nodeType="clickEffect" nodePh="1">
-                                  <p:stCondLst>
-                                    <p:cond delay="0"/>
-                                  </p:stCondLst>
-                                  <p:endCondLst>
-                                    <p:cond evt="begin" delay="0">
-                                      <p:tn val="12"/>
-                                    </p:cond>
-                                  </p:endCondLst>
-                                  <p:childTnLst>
-                                    <p:set>
-                                      <p:cBhvr>
-                                        <p:cTn id="13" dur="1" fill="hold">
-                                          <p:stCondLst>
-                                            <p:cond delay="0"/>
-                                          </p:stCondLst>
-                                        </p:cTn>
-                                        <p:tgtEl>
-                                          <p:spTgt spid="7"/>
-                                        </p:tgtEl>
-                                        <p:attrNameLst>
-                                          <p:attrName>style.visibility</p:attrName>
-                                        </p:attrNameLst>
-                                      </p:cBhvr>
-                                      <p:to>
-                                        <p:strVal val="visible"/>
-                                      </p:to>
-                                    </p:set>
-                                    <p:animEffect transition="in" filter="fade">
-                                      <p:cBhvr>
-                                        <p:cTn id="14" dur="1000"/>
-                                        <p:tgtEl>
-                                          <p:spTgt spid="7"/>
-                                        </p:tgtEl>
-                                      </p:cBhvr>
-                                    </p:animEffect>
-                                    <p:anim calcmode="lin" valueType="num">
-                                      <p:cBhvr>
-                                        <p:cTn id="15" dur="1000" fill="hold"/>
-                                        <p:tgtEl>
-                                          <p:spTgt spid="7"/>
-                                        </p:tgtEl>
-                                        <p:attrNameLst>
-                                          <p:attrName>ppt_x</p:attrName>
-                                        </p:attrNameLst>
-                                      </p:cBhvr>
-                                      <p:tavLst>
-                                        <p:tav tm="0">
-                                          <p:val>
-                                            <p:strVal val="#ppt_x"/>
-                                          </p:val>
-                                        </p:tav>
-                                        <p:tav tm="100000">
-                                          <p:val>
-                                            <p:strVal val="#ppt_x"/>
-                                          </p:val>
-                                        </p:tav>
-                                      </p:tavLst>
-                                    </p:anim>
-                                    <p:anim calcmode="lin" valueType="num">
-                                      <p:cBhvr>
-                                        <p:cTn id="16" dur="1000" fill="hold"/>
-                                        <p:tgtEl>
-                                          <p:spTgt spid="7"/>
-                                        </p:tgtEl>
-                                        <p:attrNameLst>
-                                          <p:attrName>ppt_y</p:attrName>
-                                        </p:attrNameLst>
-                                      </p:cBhvr>
-                                      <p:tavLst>
-                                        <p:tav tm="0">
-                                          <p:val>
-                                            <p:strVal val="#ppt_y+.1"/>
-                                          </p:val>
-                                        </p:tav>
-                                        <p:tav tm="100000">
-                                          <p:val>
-                                            <p:strVal val="#ppt_y"/>
-                                          </p:val>
-                                        </p:tav>
-                                      </p:tavLst>
-                                    </p:anim>
-                                  </p:childTnLst>
-                                </p:cTn>
-                              </p:par>
-                            </p:childTnLst>
-                          </p:cTn>
-                        </p:par>
-                      </p:childTnLst>
-                    </p:cTn>
-                  </p:par>
-                  <p:par>
-                    <p:cTn id="17" fill="hold">
-                      <p:stCondLst>
-                        <p:cond delay="indefinite"/>
-                      </p:stCondLst>
-                      <p:childTnLst>
-                        <p:par>
-                          <p:cTn id="18" fill="hold">
-                            <p:stCondLst>
-                              <p:cond delay="0"/>
-                            </p:stCondLst>
-                            <p:childTnLst>
-                              <p:par>
-                                <p:cTn id="19" presetID="42" presetClass="entr" presetSubtype="0" fill="hold" grpId="0" nodeType="clickEffect" nodePh="1">
-                                  <p:stCondLst>
-                                    <p:cond delay="0"/>
-                                  </p:stCondLst>
-                                  <p:endCondLst>
-                                    <p:cond evt="begin" delay="0">
-                                      <p:tn val="19"/>
-                                    </p:cond>
-                                  </p:endCondLst>
-                                  <p:childTnLst>
-                                    <p:set>
-                                      <p:cBhvr>
-                                        <p:cTn id="20" dur="1" fill="hold">
-                                          <p:stCondLst>
-                                            <p:cond delay="0"/>
-                                          </p:stCondLst>
-                                        </p:cTn>
-                                        <p:tgtEl>
-                                          <p:spTgt spid="8"/>
-                                        </p:tgtEl>
-                                        <p:attrNameLst>
-                                          <p:attrName>style.visibility</p:attrName>
-                                        </p:attrNameLst>
-                                      </p:cBhvr>
-                                      <p:to>
-                                        <p:strVal val="visible"/>
-                                      </p:to>
-                                    </p:set>
-                                    <p:animEffect transition="in" filter="fade">
-                                      <p:cBhvr>
-                                        <p:cTn id="21" dur="1000"/>
-                                        <p:tgtEl>
-                                          <p:spTgt spid="8"/>
-                                        </p:tgtEl>
-                                      </p:cBhvr>
-                                    </p:animEffect>
-                                    <p:anim calcmode="lin" valueType="num">
-                                      <p:cBhvr>
-                                        <p:cTn id="22" dur="1000" fill="hold"/>
-                                        <p:tgtEl>
-                                          <p:spTgt spid="8"/>
-                                        </p:tgtEl>
-                                        <p:attrNameLst>
-                                          <p:attrName>ppt_x</p:attrName>
-                                        </p:attrNameLst>
-                                      </p:cBhvr>
-                                      <p:tavLst>
-                                        <p:tav tm="0">
-                                          <p:val>
-                                            <p:strVal val="#ppt_x"/>
-                                          </p:val>
-                                        </p:tav>
-                                        <p:tav tm="100000">
-                                          <p:val>
-                                            <p:strVal val="#ppt_x"/>
-                                          </p:val>
-                                        </p:tav>
-                                      </p:tavLst>
-                                    </p:anim>
-                                    <p:anim calcmode="lin" valueType="num">
-                                      <p:cBhvr>
-                                        <p:cTn id="23" dur="1000" fill="hold"/>
-                                        <p:tgtEl>
-                                          <p:spTgt spid="8"/>
-                                        </p:tgtEl>
-                                        <p:attrNameLst>
-                                          <p:attrName>ppt_y</p:attrName>
-                                        </p:attrNameLst>
-                                      </p:cBhvr>
-                                      <p:tavLst>
-                                        <p:tav tm="0">
-                                          <p:val>
-                                            <p:strVal val="#ppt_y+.1"/>
-                                          </p:val>
-                                        </p:tav>
-                                        <p:tav tm="100000">
-                                          <p:val>
-                                            <p:strVal val="#ppt_y"/>
-                                          </p:val>
-                                        </p:tav>
-                                      </p:tavLst>
-                                    </p:anim>
-                                  </p:childTnLst>
-                                </p:cTn>
-                              </p:par>
-                            </p:childTnLst>
-                          </p:cTn>
-                        </p:par>
-                      </p:childTnLst>
-                    </p:cTn>
-                  </p:par>
-                </p:childTnLst>
-              </p:cTn>
-              <p:prevCondLst>
-                <p:cond evt="onPrev" delay="0">
-                  <p:tgtEl>
-                    <p:sldTgt/>
-                  </p:tgtEl>
-                </p:cond>
-              </p:prevCondLst>
-              <p:nextCondLst>
-                <p:cond evt="onNext" delay="0">
-                  <p:tgtEl>
-                    <p:sldTgt/>
-                  </p:tgtEl>
-                </p:cond>
-              </p:nextCondLst>
-            </p:seq>
-          </p:childTnLst>
-        </p:cTn>
-      </p:par>
-    </p:tnLst>
-    <p:bldLst>
-      <p:bldP spid="4" grpId="0"/>
-      <p:bldP spid="7" grpId="0"/>
-      <p:bldP spid="8" grpId="0"/>
-    </p:bldLst>
-  </p:timing>
 </p:sld>
 </file>
 
@@ -17372,464 +14159,6 @@
   <p:clrMapOvr>
     <a:masterClrMapping/>
   </p:clrMapOvr>
-  <p:timing>
-    <p:tnLst>
-      <p:par>
-        <p:cTn id="1" dur="indefinite" restart="never" nodeType="tmRoot">
-          <p:childTnLst>
-            <p:seq concurrent="1" nextAc="seek">
-              <p:cTn id="2" dur="indefinite" nodeType="mainSeq">
-                <p:childTnLst>
-                  <p:par>
-                    <p:cTn id="3" fill="hold">
-                      <p:stCondLst>
-                        <p:cond delay="indefinite"/>
-                      </p:stCondLst>
-                      <p:childTnLst>
-                        <p:par>
-                          <p:cTn id="4" fill="hold">
-                            <p:stCondLst>
-                              <p:cond delay="0"/>
-                            </p:stCondLst>
-                            <p:childTnLst>
-                              <p:par>
-                                <p:cTn id="5" presetID="53" presetClass="entr" presetSubtype="16" fill="hold" grpId="0" nodeType="clickEffect">
-                                  <p:stCondLst>
-                                    <p:cond delay="0"/>
-                                  </p:stCondLst>
-                                  <p:childTnLst>
-                                    <p:set>
-                                      <p:cBhvr>
-                                        <p:cTn id="6" dur="1" fill="hold">
-                                          <p:stCondLst>
-                                            <p:cond delay="0"/>
-                                          </p:stCondLst>
-                                        </p:cTn>
-                                        <p:tgtEl>
-                                          <p:spTgt spid="4"/>
-                                        </p:tgtEl>
-                                        <p:attrNameLst>
-                                          <p:attrName>style.visibility</p:attrName>
-                                        </p:attrNameLst>
-                                      </p:cBhvr>
-                                      <p:to>
-                                        <p:strVal val="visible"/>
-                                      </p:to>
-                                    </p:set>
-                                    <p:anim calcmode="lin" valueType="num">
-                                      <p:cBhvr>
-                                        <p:cTn id="7" dur="500" fill="hold"/>
-                                        <p:tgtEl>
-                                          <p:spTgt spid="4"/>
-                                        </p:tgtEl>
-                                        <p:attrNameLst>
-                                          <p:attrName>ppt_w</p:attrName>
-                                        </p:attrNameLst>
-                                      </p:cBhvr>
-                                      <p:tavLst>
-                                        <p:tav tm="0">
-                                          <p:val>
-                                            <p:fltVal val="0"/>
-                                          </p:val>
-                                        </p:tav>
-                                        <p:tav tm="100000">
-                                          <p:val>
-                                            <p:strVal val="#ppt_w"/>
-                                          </p:val>
-                                        </p:tav>
-                                      </p:tavLst>
-                                    </p:anim>
-                                    <p:anim calcmode="lin" valueType="num">
-                                      <p:cBhvr>
-                                        <p:cTn id="8" dur="500" fill="hold"/>
-                                        <p:tgtEl>
-                                          <p:spTgt spid="4"/>
-                                        </p:tgtEl>
-                                        <p:attrNameLst>
-                                          <p:attrName>ppt_h</p:attrName>
-                                        </p:attrNameLst>
-                                      </p:cBhvr>
-                                      <p:tavLst>
-                                        <p:tav tm="0">
-                                          <p:val>
-                                            <p:fltVal val="0"/>
-                                          </p:val>
-                                        </p:tav>
-                                        <p:tav tm="100000">
-                                          <p:val>
-                                            <p:strVal val="#ppt_h"/>
-                                          </p:val>
-                                        </p:tav>
-                                      </p:tavLst>
-                                    </p:anim>
-                                    <p:animEffect transition="in" filter="fade">
-                                      <p:cBhvr>
-                                        <p:cTn id="9" dur="500"/>
-                                        <p:tgtEl>
-                                          <p:spTgt spid="4"/>
-                                        </p:tgtEl>
-                                      </p:cBhvr>
-                                    </p:animEffect>
-                                  </p:childTnLst>
-                                </p:cTn>
-                              </p:par>
-                            </p:childTnLst>
-                          </p:cTn>
-                        </p:par>
-                      </p:childTnLst>
-                    </p:cTn>
-                  </p:par>
-                  <p:par>
-                    <p:cTn id="10" fill="hold">
-                      <p:stCondLst>
-                        <p:cond delay="indefinite"/>
-                      </p:stCondLst>
-                      <p:childTnLst>
-                        <p:par>
-                          <p:cTn id="11" fill="hold">
-                            <p:stCondLst>
-                              <p:cond delay="0"/>
-                            </p:stCondLst>
-                            <p:childTnLst>
-                              <p:par>
-                                <p:cTn id="12" presetID="42" presetClass="entr" presetSubtype="0" fill="hold" grpId="0" nodeType="clickEffect" nodePh="1">
-                                  <p:stCondLst>
-                                    <p:cond delay="0"/>
-                                  </p:stCondLst>
-                                  <p:endCondLst>
-                                    <p:cond evt="begin" delay="0">
-                                      <p:tn val="12"/>
-                                    </p:cond>
-                                  </p:endCondLst>
-                                  <p:childTnLst>
-                                    <p:set>
-                                      <p:cBhvr>
-                                        <p:cTn id="13" dur="1" fill="hold">
-                                          <p:stCondLst>
-                                            <p:cond delay="0"/>
-                                          </p:stCondLst>
-                                        </p:cTn>
-                                        <p:tgtEl>
-                                          <p:spTgt spid="7"/>
-                                        </p:tgtEl>
-                                        <p:attrNameLst>
-                                          <p:attrName>style.visibility</p:attrName>
-                                        </p:attrNameLst>
-                                      </p:cBhvr>
-                                      <p:to>
-                                        <p:strVal val="visible"/>
-                                      </p:to>
-                                    </p:set>
-                                    <p:animEffect transition="in" filter="fade">
-                                      <p:cBhvr>
-                                        <p:cTn id="14" dur="1000"/>
-                                        <p:tgtEl>
-                                          <p:spTgt spid="7"/>
-                                        </p:tgtEl>
-                                      </p:cBhvr>
-                                    </p:animEffect>
-                                    <p:anim calcmode="lin" valueType="num">
-                                      <p:cBhvr>
-                                        <p:cTn id="15" dur="1000" fill="hold"/>
-                                        <p:tgtEl>
-                                          <p:spTgt spid="7"/>
-                                        </p:tgtEl>
-                                        <p:attrNameLst>
-                                          <p:attrName>ppt_x</p:attrName>
-                                        </p:attrNameLst>
-                                      </p:cBhvr>
-                                      <p:tavLst>
-                                        <p:tav tm="0">
-                                          <p:val>
-                                            <p:strVal val="#ppt_x"/>
-                                          </p:val>
-                                        </p:tav>
-                                        <p:tav tm="100000">
-                                          <p:val>
-                                            <p:strVal val="#ppt_x"/>
-                                          </p:val>
-                                        </p:tav>
-                                      </p:tavLst>
-                                    </p:anim>
-                                    <p:anim calcmode="lin" valueType="num">
-                                      <p:cBhvr>
-                                        <p:cTn id="16" dur="1000" fill="hold"/>
-                                        <p:tgtEl>
-                                          <p:spTgt spid="7"/>
-                                        </p:tgtEl>
-                                        <p:attrNameLst>
-                                          <p:attrName>ppt_y</p:attrName>
-                                        </p:attrNameLst>
-                                      </p:cBhvr>
-                                      <p:tavLst>
-                                        <p:tav tm="0">
-                                          <p:val>
-                                            <p:strVal val="#ppt_y+.1"/>
-                                          </p:val>
-                                        </p:tav>
-                                        <p:tav tm="100000">
-                                          <p:val>
-                                            <p:strVal val="#ppt_y"/>
-                                          </p:val>
-                                        </p:tav>
-                                      </p:tavLst>
-                                    </p:anim>
-                                  </p:childTnLst>
-                                </p:cTn>
-                              </p:par>
-                            </p:childTnLst>
-                          </p:cTn>
-                        </p:par>
-                      </p:childTnLst>
-                    </p:cTn>
-                  </p:par>
-                  <p:par>
-                    <p:cTn id="17" fill="hold">
-                      <p:stCondLst>
-                        <p:cond delay="indefinite"/>
-                      </p:stCondLst>
-                      <p:childTnLst>
-                        <p:par>
-                          <p:cTn id="18" fill="hold">
-                            <p:stCondLst>
-                              <p:cond delay="0"/>
-                            </p:stCondLst>
-                            <p:childTnLst>
-                              <p:par>
-                                <p:cTn id="19" presetID="42" presetClass="entr" presetSubtype="0" fill="hold" grpId="0" nodeType="clickEffect" nodePh="1">
-                                  <p:stCondLst>
-                                    <p:cond delay="0"/>
-                                  </p:stCondLst>
-                                  <p:endCondLst>
-                                    <p:cond evt="begin" delay="0">
-                                      <p:tn val="19"/>
-                                    </p:cond>
-                                  </p:endCondLst>
-                                  <p:childTnLst>
-                                    <p:set>
-                                      <p:cBhvr>
-                                        <p:cTn id="20" dur="1" fill="hold">
-                                          <p:stCondLst>
-                                            <p:cond delay="0"/>
-                                          </p:stCondLst>
-                                        </p:cTn>
-                                        <p:tgtEl>
-                                          <p:spTgt spid="8"/>
-                                        </p:tgtEl>
-                                        <p:attrNameLst>
-                                          <p:attrName>style.visibility</p:attrName>
-                                        </p:attrNameLst>
-                                      </p:cBhvr>
-                                      <p:to>
-                                        <p:strVal val="visible"/>
-                                      </p:to>
-                                    </p:set>
-                                    <p:animEffect transition="in" filter="fade">
-                                      <p:cBhvr>
-                                        <p:cTn id="21" dur="1000"/>
-                                        <p:tgtEl>
-                                          <p:spTgt spid="8"/>
-                                        </p:tgtEl>
-                                      </p:cBhvr>
-                                    </p:animEffect>
-                                    <p:anim calcmode="lin" valueType="num">
-                                      <p:cBhvr>
-                                        <p:cTn id="22" dur="1000" fill="hold"/>
-                                        <p:tgtEl>
-                                          <p:spTgt spid="8"/>
-                                        </p:tgtEl>
-                                        <p:attrNameLst>
-                                          <p:attrName>ppt_x</p:attrName>
-                                        </p:attrNameLst>
-                                      </p:cBhvr>
-                                      <p:tavLst>
-                                        <p:tav tm="0">
-                                          <p:val>
-                                            <p:strVal val="#ppt_x"/>
-                                          </p:val>
-                                        </p:tav>
-                                        <p:tav tm="100000">
-                                          <p:val>
-                                            <p:strVal val="#ppt_x"/>
-                                          </p:val>
-                                        </p:tav>
-                                      </p:tavLst>
-                                    </p:anim>
-                                    <p:anim calcmode="lin" valueType="num">
-                                      <p:cBhvr>
-                                        <p:cTn id="23" dur="1000" fill="hold"/>
-                                        <p:tgtEl>
-                                          <p:spTgt spid="8"/>
-                                        </p:tgtEl>
-                                        <p:attrNameLst>
-                                          <p:attrName>ppt_y</p:attrName>
-                                        </p:attrNameLst>
-                                      </p:cBhvr>
-                                      <p:tavLst>
-                                        <p:tav tm="0">
-                                          <p:val>
-                                            <p:strVal val="#ppt_y+.1"/>
-                                          </p:val>
-                                        </p:tav>
-                                        <p:tav tm="100000">
-                                          <p:val>
-                                            <p:strVal val="#ppt_y"/>
-                                          </p:val>
-                                        </p:tav>
-                                      </p:tavLst>
-                                    </p:anim>
-                                  </p:childTnLst>
-                                </p:cTn>
-                              </p:par>
-                            </p:childTnLst>
-                          </p:cTn>
-                        </p:par>
-                      </p:childTnLst>
-                    </p:cTn>
-                  </p:par>
-                  <p:par>
-                    <p:cTn id="24" fill="hold">
-                      <p:stCondLst>
-                        <p:cond delay="indefinite"/>
-                      </p:stCondLst>
-                      <p:childTnLst>
-                        <p:par>
-                          <p:cTn id="25" fill="hold">
-                            <p:stCondLst>
-                              <p:cond delay="0"/>
-                            </p:stCondLst>
-                            <p:childTnLst>
-                              <p:par>
-                                <p:cTn id="26" presetID="42" presetClass="entr" presetSubtype="0" fill="hold" grpId="0" nodeType="clickEffect">
-                                  <p:stCondLst>
-                                    <p:cond delay="0"/>
-                                  </p:stCondLst>
-                                  <p:childTnLst>
-                                    <p:set>
-                                      <p:cBhvr>
-                                        <p:cTn id="27" dur="1" fill="hold">
-                                          <p:stCondLst>
-                                            <p:cond delay="0"/>
-                                          </p:stCondLst>
-                                        </p:cTn>
-                                        <p:tgtEl>
-                                          <p:spTgt spid="10">
-                                            <p:txEl>
-                                              <p:pRg st="0" end="0"/>
-                                            </p:txEl>
-                                          </p:spTgt>
-                                        </p:tgtEl>
-                                        <p:attrNameLst>
-                                          <p:attrName>style.visibility</p:attrName>
-                                        </p:attrNameLst>
-                                      </p:cBhvr>
-                                      <p:to>
-                                        <p:strVal val="visible"/>
-                                      </p:to>
-                                    </p:set>
-                                    <p:animEffect transition="in" filter="fade">
-                                      <p:cBhvr>
-                                        <p:cTn id="28" dur="1000"/>
-                                        <p:tgtEl>
-                                          <p:spTgt spid="10">
-                                            <p:txEl>
-                                              <p:pRg st="0" end="0"/>
-                                            </p:txEl>
-                                          </p:spTgt>
-                                        </p:tgtEl>
-                                      </p:cBhvr>
-                                    </p:animEffect>
-                                    <p:anim calcmode="lin" valueType="num">
-                                      <p:cBhvr>
-                                        <p:cTn id="29" dur="1000" fill="hold"/>
-                                        <p:tgtEl>
-                                          <p:spTgt spid="10">
-                                            <p:txEl>
-                                              <p:pRg st="0" end="0"/>
-                                            </p:txEl>
-                                          </p:spTgt>
-                                        </p:tgtEl>
-                                        <p:attrNameLst>
-                                          <p:attrName>ppt_x</p:attrName>
-                                        </p:attrNameLst>
-                                      </p:cBhvr>
-                                      <p:tavLst>
-                                        <p:tav tm="0">
-                                          <p:val>
-                                            <p:strVal val="#ppt_x"/>
-                                          </p:val>
-                                        </p:tav>
-                                        <p:tav tm="100000">
-                                          <p:val>
-                                            <p:strVal val="#ppt_x"/>
-                                          </p:val>
-                                        </p:tav>
-                                      </p:tavLst>
-                                    </p:anim>
-                                    <p:anim calcmode="lin" valueType="num">
-                                      <p:cBhvr>
-                                        <p:cTn id="30" dur="1000" fill="hold"/>
-                                        <p:tgtEl>
-                                          <p:spTgt spid="10">
-                                            <p:txEl>
-                                              <p:pRg st="0" end="0"/>
-                                            </p:txEl>
-                                          </p:spTgt>
-                                        </p:tgtEl>
-                                        <p:attrNameLst>
-                                          <p:attrName>ppt_y</p:attrName>
-                                        </p:attrNameLst>
-                                      </p:cBhvr>
-                                      <p:tavLst>
-                                        <p:tav tm="0">
-                                          <p:val>
-                                            <p:strVal val="#ppt_y+.1"/>
-                                          </p:val>
-                                        </p:tav>
-                                        <p:tav tm="100000">
-                                          <p:val>
-                                            <p:strVal val="#ppt_y"/>
-                                          </p:val>
-                                        </p:tav>
-                                      </p:tavLst>
-                                    </p:anim>
-                                  </p:childTnLst>
-                                </p:cTn>
-                              </p:par>
-                            </p:childTnLst>
-                          </p:cTn>
-                        </p:par>
-                      </p:childTnLst>
-                    </p:cTn>
-                  </p:par>
-                </p:childTnLst>
-              </p:cTn>
-              <p:prevCondLst>
-                <p:cond evt="onPrev" delay="0">
-                  <p:tgtEl>
-                    <p:sldTgt/>
-                  </p:tgtEl>
-                </p:cond>
-              </p:prevCondLst>
-              <p:nextCondLst>
-                <p:cond evt="onNext" delay="0">
-                  <p:tgtEl>
-                    <p:sldTgt/>
-                  </p:tgtEl>
-                </p:cond>
-              </p:nextCondLst>
-            </p:seq>
-          </p:childTnLst>
-        </p:cTn>
-      </p:par>
-    </p:tnLst>
-    <p:bldLst>
-      <p:bldP spid="4" grpId="0"/>
-      <p:bldP spid="7" grpId="0"/>
-      <p:bldP spid="8" grpId="0"/>
-      <p:bldP spid="10" grpId="0" build="p"/>
-    </p:bldLst>
-  </p:timing>
 </p:sld>
 </file>
 
@@ -18050,464 +14379,6 @@
   <p:clrMapOvr>
     <a:masterClrMapping/>
   </p:clrMapOvr>
-  <p:timing>
-    <p:tnLst>
-      <p:par>
-        <p:cTn id="1" dur="indefinite" restart="never" nodeType="tmRoot">
-          <p:childTnLst>
-            <p:seq concurrent="1" nextAc="seek">
-              <p:cTn id="2" dur="indefinite" nodeType="mainSeq">
-                <p:childTnLst>
-                  <p:par>
-                    <p:cTn id="3" fill="hold">
-                      <p:stCondLst>
-                        <p:cond delay="indefinite"/>
-                      </p:stCondLst>
-                      <p:childTnLst>
-                        <p:par>
-                          <p:cTn id="4" fill="hold">
-                            <p:stCondLst>
-                              <p:cond delay="0"/>
-                            </p:stCondLst>
-                            <p:childTnLst>
-                              <p:par>
-                                <p:cTn id="5" presetID="53" presetClass="entr" presetSubtype="16" fill="hold" grpId="0" nodeType="clickEffect">
-                                  <p:stCondLst>
-                                    <p:cond delay="0"/>
-                                  </p:stCondLst>
-                                  <p:childTnLst>
-                                    <p:set>
-                                      <p:cBhvr>
-                                        <p:cTn id="6" dur="1" fill="hold">
-                                          <p:stCondLst>
-                                            <p:cond delay="0"/>
-                                          </p:stCondLst>
-                                        </p:cTn>
-                                        <p:tgtEl>
-                                          <p:spTgt spid="4"/>
-                                        </p:tgtEl>
-                                        <p:attrNameLst>
-                                          <p:attrName>style.visibility</p:attrName>
-                                        </p:attrNameLst>
-                                      </p:cBhvr>
-                                      <p:to>
-                                        <p:strVal val="visible"/>
-                                      </p:to>
-                                    </p:set>
-                                    <p:anim calcmode="lin" valueType="num">
-                                      <p:cBhvr>
-                                        <p:cTn id="7" dur="500" fill="hold"/>
-                                        <p:tgtEl>
-                                          <p:spTgt spid="4"/>
-                                        </p:tgtEl>
-                                        <p:attrNameLst>
-                                          <p:attrName>ppt_w</p:attrName>
-                                        </p:attrNameLst>
-                                      </p:cBhvr>
-                                      <p:tavLst>
-                                        <p:tav tm="0">
-                                          <p:val>
-                                            <p:fltVal val="0"/>
-                                          </p:val>
-                                        </p:tav>
-                                        <p:tav tm="100000">
-                                          <p:val>
-                                            <p:strVal val="#ppt_w"/>
-                                          </p:val>
-                                        </p:tav>
-                                      </p:tavLst>
-                                    </p:anim>
-                                    <p:anim calcmode="lin" valueType="num">
-                                      <p:cBhvr>
-                                        <p:cTn id="8" dur="500" fill="hold"/>
-                                        <p:tgtEl>
-                                          <p:spTgt spid="4"/>
-                                        </p:tgtEl>
-                                        <p:attrNameLst>
-                                          <p:attrName>ppt_h</p:attrName>
-                                        </p:attrNameLst>
-                                      </p:cBhvr>
-                                      <p:tavLst>
-                                        <p:tav tm="0">
-                                          <p:val>
-                                            <p:fltVal val="0"/>
-                                          </p:val>
-                                        </p:tav>
-                                        <p:tav tm="100000">
-                                          <p:val>
-                                            <p:strVal val="#ppt_h"/>
-                                          </p:val>
-                                        </p:tav>
-                                      </p:tavLst>
-                                    </p:anim>
-                                    <p:animEffect transition="in" filter="fade">
-                                      <p:cBhvr>
-                                        <p:cTn id="9" dur="500"/>
-                                        <p:tgtEl>
-                                          <p:spTgt spid="4"/>
-                                        </p:tgtEl>
-                                      </p:cBhvr>
-                                    </p:animEffect>
-                                  </p:childTnLst>
-                                </p:cTn>
-                              </p:par>
-                            </p:childTnLst>
-                          </p:cTn>
-                        </p:par>
-                      </p:childTnLst>
-                    </p:cTn>
-                  </p:par>
-                  <p:par>
-                    <p:cTn id="10" fill="hold">
-                      <p:stCondLst>
-                        <p:cond delay="indefinite"/>
-                      </p:stCondLst>
-                      <p:childTnLst>
-                        <p:par>
-                          <p:cTn id="11" fill="hold">
-                            <p:stCondLst>
-                              <p:cond delay="0"/>
-                            </p:stCondLst>
-                            <p:childTnLst>
-                              <p:par>
-                                <p:cTn id="12" presetID="42" presetClass="entr" presetSubtype="0" fill="hold" grpId="0" nodeType="clickEffect" nodePh="1">
-                                  <p:stCondLst>
-                                    <p:cond delay="0"/>
-                                  </p:stCondLst>
-                                  <p:endCondLst>
-                                    <p:cond evt="begin" delay="0">
-                                      <p:tn val="12"/>
-                                    </p:cond>
-                                  </p:endCondLst>
-                                  <p:childTnLst>
-                                    <p:set>
-                                      <p:cBhvr>
-                                        <p:cTn id="13" dur="1" fill="hold">
-                                          <p:stCondLst>
-                                            <p:cond delay="0"/>
-                                          </p:stCondLst>
-                                        </p:cTn>
-                                        <p:tgtEl>
-                                          <p:spTgt spid="7"/>
-                                        </p:tgtEl>
-                                        <p:attrNameLst>
-                                          <p:attrName>style.visibility</p:attrName>
-                                        </p:attrNameLst>
-                                      </p:cBhvr>
-                                      <p:to>
-                                        <p:strVal val="visible"/>
-                                      </p:to>
-                                    </p:set>
-                                    <p:animEffect transition="in" filter="fade">
-                                      <p:cBhvr>
-                                        <p:cTn id="14" dur="1000"/>
-                                        <p:tgtEl>
-                                          <p:spTgt spid="7"/>
-                                        </p:tgtEl>
-                                      </p:cBhvr>
-                                    </p:animEffect>
-                                    <p:anim calcmode="lin" valueType="num">
-                                      <p:cBhvr>
-                                        <p:cTn id="15" dur="1000" fill="hold"/>
-                                        <p:tgtEl>
-                                          <p:spTgt spid="7"/>
-                                        </p:tgtEl>
-                                        <p:attrNameLst>
-                                          <p:attrName>ppt_x</p:attrName>
-                                        </p:attrNameLst>
-                                      </p:cBhvr>
-                                      <p:tavLst>
-                                        <p:tav tm="0">
-                                          <p:val>
-                                            <p:strVal val="#ppt_x"/>
-                                          </p:val>
-                                        </p:tav>
-                                        <p:tav tm="100000">
-                                          <p:val>
-                                            <p:strVal val="#ppt_x"/>
-                                          </p:val>
-                                        </p:tav>
-                                      </p:tavLst>
-                                    </p:anim>
-                                    <p:anim calcmode="lin" valueType="num">
-                                      <p:cBhvr>
-                                        <p:cTn id="16" dur="1000" fill="hold"/>
-                                        <p:tgtEl>
-                                          <p:spTgt spid="7"/>
-                                        </p:tgtEl>
-                                        <p:attrNameLst>
-                                          <p:attrName>ppt_y</p:attrName>
-                                        </p:attrNameLst>
-                                      </p:cBhvr>
-                                      <p:tavLst>
-                                        <p:tav tm="0">
-                                          <p:val>
-                                            <p:strVal val="#ppt_y+.1"/>
-                                          </p:val>
-                                        </p:tav>
-                                        <p:tav tm="100000">
-                                          <p:val>
-                                            <p:strVal val="#ppt_y"/>
-                                          </p:val>
-                                        </p:tav>
-                                      </p:tavLst>
-                                    </p:anim>
-                                  </p:childTnLst>
-                                </p:cTn>
-                              </p:par>
-                            </p:childTnLst>
-                          </p:cTn>
-                        </p:par>
-                      </p:childTnLst>
-                    </p:cTn>
-                  </p:par>
-                  <p:par>
-                    <p:cTn id="17" fill="hold">
-                      <p:stCondLst>
-                        <p:cond delay="indefinite"/>
-                      </p:stCondLst>
-                      <p:childTnLst>
-                        <p:par>
-                          <p:cTn id="18" fill="hold">
-                            <p:stCondLst>
-                              <p:cond delay="0"/>
-                            </p:stCondLst>
-                            <p:childTnLst>
-                              <p:par>
-                                <p:cTn id="19" presetID="42" presetClass="entr" presetSubtype="0" fill="hold" grpId="0" nodeType="clickEffect" nodePh="1">
-                                  <p:stCondLst>
-                                    <p:cond delay="0"/>
-                                  </p:stCondLst>
-                                  <p:endCondLst>
-                                    <p:cond evt="begin" delay="0">
-                                      <p:tn val="19"/>
-                                    </p:cond>
-                                  </p:endCondLst>
-                                  <p:childTnLst>
-                                    <p:set>
-                                      <p:cBhvr>
-                                        <p:cTn id="20" dur="1" fill="hold">
-                                          <p:stCondLst>
-                                            <p:cond delay="0"/>
-                                          </p:stCondLst>
-                                        </p:cTn>
-                                        <p:tgtEl>
-                                          <p:spTgt spid="8"/>
-                                        </p:tgtEl>
-                                        <p:attrNameLst>
-                                          <p:attrName>style.visibility</p:attrName>
-                                        </p:attrNameLst>
-                                      </p:cBhvr>
-                                      <p:to>
-                                        <p:strVal val="visible"/>
-                                      </p:to>
-                                    </p:set>
-                                    <p:animEffect transition="in" filter="fade">
-                                      <p:cBhvr>
-                                        <p:cTn id="21" dur="1000"/>
-                                        <p:tgtEl>
-                                          <p:spTgt spid="8"/>
-                                        </p:tgtEl>
-                                      </p:cBhvr>
-                                    </p:animEffect>
-                                    <p:anim calcmode="lin" valueType="num">
-                                      <p:cBhvr>
-                                        <p:cTn id="22" dur="1000" fill="hold"/>
-                                        <p:tgtEl>
-                                          <p:spTgt spid="8"/>
-                                        </p:tgtEl>
-                                        <p:attrNameLst>
-                                          <p:attrName>ppt_x</p:attrName>
-                                        </p:attrNameLst>
-                                      </p:cBhvr>
-                                      <p:tavLst>
-                                        <p:tav tm="0">
-                                          <p:val>
-                                            <p:strVal val="#ppt_x"/>
-                                          </p:val>
-                                        </p:tav>
-                                        <p:tav tm="100000">
-                                          <p:val>
-                                            <p:strVal val="#ppt_x"/>
-                                          </p:val>
-                                        </p:tav>
-                                      </p:tavLst>
-                                    </p:anim>
-                                    <p:anim calcmode="lin" valueType="num">
-                                      <p:cBhvr>
-                                        <p:cTn id="23" dur="1000" fill="hold"/>
-                                        <p:tgtEl>
-                                          <p:spTgt spid="8"/>
-                                        </p:tgtEl>
-                                        <p:attrNameLst>
-                                          <p:attrName>ppt_y</p:attrName>
-                                        </p:attrNameLst>
-                                      </p:cBhvr>
-                                      <p:tavLst>
-                                        <p:tav tm="0">
-                                          <p:val>
-                                            <p:strVal val="#ppt_y+.1"/>
-                                          </p:val>
-                                        </p:tav>
-                                        <p:tav tm="100000">
-                                          <p:val>
-                                            <p:strVal val="#ppt_y"/>
-                                          </p:val>
-                                        </p:tav>
-                                      </p:tavLst>
-                                    </p:anim>
-                                  </p:childTnLst>
-                                </p:cTn>
-                              </p:par>
-                            </p:childTnLst>
-                          </p:cTn>
-                        </p:par>
-                      </p:childTnLst>
-                    </p:cTn>
-                  </p:par>
-                  <p:par>
-                    <p:cTn id="24" fill="hold">
-                      <p:stCondLst>
-                        <p:cond delay="indefinite"/>
-                      </p:stCondLst>
-                      <p:childTnLst>
-                        <p:par>
-                          <p:cTn id="25" fill="hold">
-                            <p:stCondLst>
-                              <p:cond delay="0"/>
-                            </p:stCondLst>
-                            <p:childTnLst>
-                              <p:par>
-                                <p:cTn id="26" presetID="42" presetClass="entr" presetSubtype="0" fill="hold" grpId="0" nodeType="clickEffect">
-                                  <p:stCondLst>
-                                    <p:cond delay="0"/>
-                                  </p:stCondLst>
-                                  <p:childTnLst>
-                                    <p:set>
-                                      <p:cBhvr>
-                                        <p:cTn id="27" dur="1" fill="hold">
-                                          <p:stCondLst>
-                                            <p:cond delay="0"/>
-                                          </p:stCondLst>
-                                        </p:cTn>
-                                        <p:tgtEl>
-                                          <p:spTgt spid="10">
-                                            <p:txEl>
-                                              <p:pRg st="0" end="0"/>
-                                            </p:txEl>
-                                          </p:spTgt>
-                                        </p:tgtEl>
-                                        <p:attrNameLst>
-                                          <p:attrName>style.visibility</p:attrName>
-                                        </p:attrNameLst>
-                                      </p:cBhvr>
-                                      <p:to>
-                                        <p:strVal val="visible"/>
-                                      </p:to>
-                                    </p:set>
-                                    <p:animEffect transition="in" filter="fade">
-                                      <p:cBhvr>
-                                        <p:cTn id="28" dur="1000"/>
-                                        <p:tgtEl>
-                                          <p:spTgt spid="10">
-                                            <p:txEl>
-                                              <p:pRg st="0" end="0"/>
-                                            </p:txEl>
-                                          </p:spTgt>
-                                        </p:tgtEl>
-                                      </p:cBhvr>
-                                    </p:animEffect>
-                                    <p:anim calcmode="lin" valueType="num">
-                                      <p:cBhvr>
-                                        <p:cTn id="29" dur="1000" fill="hold"/>
-                                        <p:tgtEl>
-                                          <p:spTgt spid="10">
-                                            <p:txEl>
-                                              <p:pRg st="0" end="0"/>
-                                            </p:txEl>
-                                          </p:spTgt>
-                                        </p:tgtEl>
-                                        <p:attrNameLst>
-                                          <p:attrName>ppt_x</p:attrName>
-                                        </p:attrNameLst>
-                                      </p:cBhvr>
-                                      <p:tavLst>
-                                        <p:tav tm="0">
-                                          <p:val>
-                                            <p:strVal val="#ppt_x"/>
-                                          </p:val>
-                                        </p:tav>
-                                        <p:tav tm="100000">
-                                          <p:val>
-                                            <p:strVal val="#ppt_x"/>
-                                          </p:val>
-                                        </p:tav>
-                                      </p:tavLst>
-                                    </p:anim>
-                                    <p:anim calcmode="lin" valueType="num">
-                                      <p:cBhvr>
-                                        <p:cTn id="30" dur="1000" fill="hold"/>
-                                        <p:tgtEl>
-                                          <p:spTgt spid="10">
-                                            <p:txEl>
-                                              <p:pRg st="0" end="0"/>
-                                            </p:txEl>
-                                          </p:spTgt>
-                                        </p:tgtEl>
-                                        <p:attrNameLst>
-                                          <p:attrName>ppt_y</p:attrName>
-                                        </p:attrNameLst>
-                                      </p:cBhvr>
-                                      <p:tavLst>
-                                        <p:tav tm="0">
-                                          <p:val>
-                                            <p:strVal val="#ppt_y+.1"/>
-                                          </p:val>
-                                        </p:tav>
-                                        <p:tav tm="100000">
-                                          <p:val>
-                                            <p:strVal val="#ppt_y"/>
-                                          </p:val>
-                                        </p:tav>
-                                      </p:tavLst>
-                                    </p:anim>
-                                  </p:childTnLst>
-                                </p:cTn>
-                              </p:par>
-                            </p:childTnLst>
-                          </p:cTn>
-                        </p:par>
-                      </p:childTnLst>
-                    </p:cTn>
-                  </p:par>
-                </p:childTnLst>
-              </p:cTn>
-              <p:prevCondLst>
-                <p:cond evt="onPrev" delay="0">
-                  <p:tgtEl>
-                    <p:sldTgt/>
-                  </p:tgtEl>
-                </p:cond>
-              </p:prevCondLst>
-              <p:nextCondLst>
-                <p:cond evt="onNext" delay="0">
-                  <p:tgtEl>
-                    <p:sldTgt/>
-                  </p:tgtEl>
-                </p:cond>
-              </p:nextCondLst>
-            </p:seq>
-          </p:childTnLst>
-        </p:cTn>
-      </p:par>
-    </p:tnLst>
-    <p:bldLst>
-      <p:bldP spid="4" grpId="0"/>
-      <p:bldP spid="7" grpId="0"/>
-      <p:bldP spid="8" grpId="0"/>
-      <p:bldP spid="10" grpId="0" build="p"/>
-    </p:bldLst>
-  </p:timing>
 </p:sld>
 </file>
 
@@ -18728,464 +14599,6 @@
   <p:clrMapOvr>
     <a:masterClrMapping/>
   </p:clrMapOvr>
-  <p:timing>
-    <p:tnLst>
-      <p:par>
-        <p:cTn id="1" dur="indefinite" restart="never" nodeType="tmRoot">
-          <p:childTnLst>
-            <p:seq concurrent="1" nextAc="seek">
-              <p:cTn id="2" dur="indefinite" nodeType="mainSeq">
-                <p:childTnLst>
-                  <p:par>
-                    <p:cTn id="3" fill="hold">
-                      <p:stCondLst>
-                        <p:cond delay="indefinite"/>
-                      </p:stCondLst>
-                      <p:childTnLst>
-                        <p:par>
-                          <p:cTn id="4" fill="hold">
-                            <p:stCondLst>
-                              <p:cond delay="0"/>
-                            </p:stCondLst>
-                            <p:childTnLst>
-                              <p:par>
-                                <p:cTn id="5" presetID="53" presetClass="entr" presetSubtype="16" fill="hold" grpId="0" nodeType="clickEffect">
-                                  <p:stCondLst>
-                                    <p:cond delay="0"/>
-                                  </p:stCondLst>
-                                  <p:childTnLst>
-                                    <p:set>
-                                      <p:cBhvr>
-                                        <p:cTn id="6" dur="1" fill="hold">
-                                          <p:stCondLst>
-                                            <p:cond delay="0"/>
-                                          </p:stCondLst>
-                                        </p:cTn>
-                                        <p:tgtEl>
-                                          <p:spTgt spid="4"/>
-                                        </p:tgtEl>
-                                        <p:attrNameLst>
-                                          <p:attrName>style.visibility</p:attrName>
-                                        </p:attrNameLst>
-                                      </p:cBhvr>
-                                      <p:to>
-                                        <p:strVal val="visible"/>
-                                      </p:to>
-                                    </p:set>
-                                    <p:anim calcmode="lin" valueType="num">
-                                      <p:cBhvr>
-                                        <p:cTn id="7" dur="500" fill="hold"/>
-                                        <p:tgtEl>
-                                          <p:spTgt spid="4"/>
-                                        </p:tgtEl>
-                                        <p:attrNameLst>
-                                          <p:attrName>ppt_w</p:attrName>
-                                        </p:attrNameLst>
-                                      </p:cBhvr>
-                                      <p:tavLst>
-                                        <p:tav tm="0">
-                                          <p:val>
-                                            <p:fltVal val="0"/>
-                                          </p:val>
-                                        </p:tav>
-                                        <p:tav tm="100000">
-                                          <p:val>
-                                            <p:strVal val="#ppt_w"/>
-                                          </p:val>
-                                        </p:tav>
-                                      </p:tavLst>
-                                    </p:anim>
-                                    <p:anim calcmode="lin" valueType="num">
-                                      <p:cBhvr>
-                                        <p:cTn id="8" dur="500" fill="hold"/>
-                                        <p:tgtEl>
-                                          <p:spTgt spid="4"/>
-                                        </p:tgtEl>
-                                        <p:attrNameLst>
-                                          <p:attrName>ppt_h</p:attrName>
-                                        </p:attrNameLst>
-                                      </p:cBhvr>
-                                      <p:tavLst>
-                                        <p:tav tm="0">
-                                          <p:val>
-                                            <p:fltVal val="0"/>
-                                          </p:val>
-                                        </p:tav>
-                                        <p:tav tm="100000">
-                                          <p:val>
-                                            <p:strVal val="#ppt_h"/>
-                                          </p:val>
-                                        </p:tav>
-                                      </p:tavLst>
-                                    </p:anim>
-                                    <p:animEffect transition="in" filter="fade">
-                                      <p:cBhvr>
-                                        <p:cTn id="9" dur="500"/>
-                                        <p:tgtEl>
-                                          <p:spTgt spid="4"/>
-                                        </p:tgtEl>
-                                      </p:cBhvr>
-                                    </p:animEffect>
-                                  </p:childTnLst>
-                                </p:cTn>
-                              </p:par>
-                            </p:childTnLst>
-                          </p:cTn>
-                        </p:par>
-                      </p:childTnLst>
-                    </p:cTn>
-                  </p:par>
-                  <p:par>
-                    <p:cTn id="10" fill="hold">
-                      <p:stCondLst>
-                        <p:cond delay="indefinite"/>
-                      </p:stCondLst>
-                      <p:childTnLst>
-                        <p:par>
-                          <p:cTn id="11" fill="hold">
-                            <p:stCondLst>
-                              <p:cond delay="0"/>
-                            </p:stCondLst>
-                            <p:childTnLst>
-                              <p:par>
-                                <p:cTn id="12" presetID="42" presetClass="entr" presetSubtype="0" fill="hold" grpId="0" nodeType="clickEffect" nodePh="1">
-                                  <p:stCondLst>
-                                    <p:cond delay="0"/>
-                                  </p:stCondLst>
-                                  <p:endCondLst>
-                                    <p:cond evt="begin" delay="0">
-                                      <p:tn val="12"/>
-                                    </p:cond>
-                                  </p:endCondLst>
-                                  <p:childTnLst>
-                                    <p:set>
-                                      <p:cBhvr>
-                                        <p:cTn id="13" dur="1" fill="hold">
-                                          <p:stCondLst>
-                                            <p:cond delay="0"/>
-                                          </p:stCondLst>
-                                        </p:cTn>
-                                        <p:tgtEl>
-                                          <p:spTgt spid="7"/>
-                                        </p:tgtEl>
-                                        <p:attrNameLst>
-                                          <p:attrName>style.visibility</p:attrName>
-                                        </p:attrNameLst>
-                                      </p:cBhvr>
-                                      <p:to>
-                                        <p:strVal val="visible"/>
-                                      </p:to>
-                                    </p:set>
-                                    <p:animEffect transition="in" filter="fade">
-                                      <p:cBhvr>
-                                        <p:cTn id="14" dur="1000"/>
-                                        <p:tgtEl>
-                                          <p:spTgt spid="7"/>
-                                        </p:tgtEl>
-                                      </p:cBhvr>
-                                    </p:animEffect>
-                                    <p:anim calcmode="lin" valueType="num">
-                                      <p:cBhvr>
-                                        <p:cTn id="15" dur="1000" fill="hold"/>
-                                        <p:tgtEl>
-                                          <p:spTgt spid="7"/>
-                                        </p:tgtEl>
-                                        <p:attrNameLst>
-                                          <p:attrName>ppt_x</p:attrName>
-                                        </p:attrNameLst>
-                                      </p:cBhvr>
-                                      <p:tavLst>
-                                        <p:tav tm="0">
-                                          <p:val>
-                                            <p:strVal val="#ppt_x"/>
-                                          </p:val>
-                                        </p:tav>
-                                        <p:tav tm="100000">
-                                          <p:val>
-                                            <p:strVal val="#ppt_x"/>
-                                          </p:val>
-                                        </p:tav>
-                                      </p:tavLst>
-                                    </p:anim>
-                                    <p:anim calcmode="lin" valueType="num">
-                                      <p:cBhvr>
-                                        <p:cTn id="16" dur="1000" fill="hold"/>
-                                        <p:tgtEl>
-                                          <p:spTgt spid="7"/>
-                                        </p:tgtEl>
-                                        <p:attrNameLst>
-                                          <p:attrName>ppt_y</p:attrName>
-                                        </p:attrNameLst>
-                                      </p:cBhvr>
-                                      <p:tavLst>
-                                        <p:tav tm="0">
-                                          <p:val>
-                                            <p:strVal val="#ppt_y+.1"/>
-                                          </p:val>
-                                        </p:tav>
-                                        <p:tav tm="100000">
-                                          <p:val>
-                                            <p:strVal val="#ppt_y"/>
-                                          </p:val>
-                                        </p:tav>
-                                      </p:tavLst>
-                                    </p:anim>
-                                  </p:childTnLst>
-                                </p:cTn>
-                              </p:par>
-                            </p:childTnLst>
-                          </p:cTn>
-                        </p:par>
-                      </p:childTnLst>
-                    </p:cTn>
-                  </p:par>
-                  <p:par>
-                    <p:cTn id="17" fill="hold">
-                      <p:stCondLst>
-                        <p:cond delay="indefinite"/>
-                      </p:stCondLst>
-                      <p:childTnLst>
-                        <p:par>
-                          <p:cTn id="18" fill="hold">
-                            <p:stCondLst>
-                              <p:cond delay="0"/>
-                            </p:stCondLst>
-                            <p:childTnLst>
-                              <p:par>
-                                <p:cTn id="19" presetID="42" presetClass="entr" presetSubtype="0" fill="hold" grpId="0" nodeType="clickEffect" nodePh="1">
-                                  <p:stCondLst>
-                                    <p:cond delay="0"/>
-                                  </p:stCondLst>
-                                  <p:endCondLst>
-                                    <p:cond evt="begin" delay="0">
-                                      <p:tn val="19"/>
-                                    </p:cond>
-                                  </p:endCondLst>
-                                  <p:childTnLst>
-                                    <p:set>
-                                      <p:cBhvr>
-                                        <p:cTn id="20" dur="1" fill="hold">
-                                          <p:stCondLst>
-                                            <p:cond delay="0"/>
-                                          </p:stCondLst>
-                                        </p:cTn>
-                                        <p:tgtEl>
-                                          <p:spTgt spid="8"/>
-                                        </p:tgtEl>
-                                        <p:attrNameLst>
-                                          <p:attrName>style.visibility</p:attrName>
-                                        </p:attrNameLst>
-                                      </p:cBhvr>
-                                      <p:to>
-                                        <p:strVal val="visible"/>
-                                      </p:to>
-                                    </p:set>
-                                    <p:animEffect transition="in" filter="fade">
-                                      <p:cBhvr>
-                                        <p:cTn id="21" dur="1000"/>
-                                        <p:tgtEl>
-                                          <p:spTgt spid="8"/>
-                                        </p:tgtEl>
-                                      </p:cBhvr>
-                                    </p:animEffect>
-                                    <p:anim calcmode="lin" valueType="num">
-                                      <p:cBhvr>
-                                        <p:cTn id="22" dur="1000" fill="hold"/>
-                                        <p:tgtEl>
-                                          <p:spTgt spid="8"/>
-                                        </p:tgtEl>
-                                        <p:attrNameLst>
-                                          <p:attrName>ppt_x</p:attrName>
-                                        </p:attrNameLst>
-                                      </p:cBhvr>
-                                      <p:tavLst>
-                                        <p:tav tm="0">
-                                          <p:val>
-                                            <p:strVal val="#ppt_x"/>
-                                          </p:val>
-                                        </p:tav>
-                                        <p:tav tm="100000">
-                                          <p:val>
-                                            <p:strVal val="#ppt_x"/>
-                                          </p:val>
-                                        </p:tav>
-                                      </p:tavLst>
-                                    </p:anim>
-                                    <p:anim calcmode="lin" valueType="num">
-                                      <p:cBhvr>
-                                        <p:cTn id="23" dur="1000" fill="hold"/>
-                                        <p:tgtEl>
-                                          <p:spTgt spid="8"/>
-                                        </p:tgtEl>
-                                        <p:attrNameLst>
-                                          <p:attrName>ppt_y</p:attrName>
-                                        </p:attrNameLst>
-                                      </p:cBhvr>
-                                      <p:tavLst>
-                                        <p:tav tm="0">
-                                          <p:val>
-                                            <p:strVal val="#ppt_y+.1"/>
-                                          </p:val>
-                                        </p:tav>
-                                        <p:tav tm="100000">
-                                          <p:val>
-                                            <p:strVal val="#ppt_y"/>
-                                          </p:val>
-                                        </p:tav>
-                                      </p:tavLst>
-                                    </p:anim>
-                                  </p:childTnLst>
-                                </p:cTn>
-                              </p:par>
-                            </p:childTnLst>
-                          </p:cTn>
-                        </p:par>
-                      </p:childTnLst>
-                    </p:cTn>
-                  </p:par>
-                  <p:par>
-                    <p:cTn id="24" fill="hold">
-                      <p:stCondLst>
-                        <p:cond delay="indefinite"/>
-                      </p:stCondLst>
-                      <p:childTnLst>
-                        <p:par>
-                          <p:cTn id="25" fill="hold">
-                            <p:stCondLst>
-                              <p:cond delay="0"/>
-                            </p:stCondLst>
-                            <p:childTnLst>
-                              <p:par>
-                                <p:cTn id="26" presetID="42" presetClass="entr" presetSubtype="0" fill="hold" grpId="0" nodeType="clickEffect">
-                                  <p:stCondLst>
-                                    <p:cond delay="0"/>
-                                  </p:stCondLst>
-                                  <p:childTnLst>
-                                    <p:set>
-                                      <p:cBhvr>
-                                        <p:cTn id="27" dur="1" fill="hold">
-                                          <p:stCondLst>
-                                            <p:cond delay="0"/>
-                                          </p:stCondLst>
-                                        </p:cTn>
-                                        <p:tgtEl>
-                                          <p:spTgt spid="10">
-                                            <p:txEl>
-                                              <p:pRg st="0" end="0"/>
-                                            </p:txEl>
-                                          </p:spTgt>
-                                        </p:tgtEl>
-                                        <p:attrNameLst>
-                                          <p:attrName>style.visibility</p:attrName>
-                                        </p:attrNameLst>
-                                      </p:cBhvr>
-                                      <p:to>
-                                        <p:strVal val="visible"/>
-                                      </p:to>
-                                    </p:set>
-                                    <p:animEffect transition="in" filter="fade">
-                                      <p:cBhvr>
-                                        <p:cTn id="28" dur="1000"/>
-                                        <p:tgtEl>
-                                          <p:spTgt spid="10">
-                                            <p:txEl>
-                                              <p:pRg st="0" end="0"/>
-                                            </p:txEl>
-                                          </p:spTgt>
-                                        </p:tgtEl>
-                                      </p:cBhvr>
-                                    </p:animEffect>
-                                    <p:anim calcmode="lin" valueType="num">
-                                      <p:cBhvr>
-                                        <p:cTn id="29" dur="1000" fill="hold"/>
-                                        <p:tgtEl>
-                                          <p:spTgt spid="10">
-                                            <p:txEl>
-                                              <p:pRg st="0" end="0"/>
-                                            </p:txEl>
-                                          </p:spTgt>
-                                        </p:tgtEl>
-                                        <p:attrNameLst>
-                                          <p:attrName>ppt_x</p:attrName>
-                                        </p:attrNameLst>
-                                      </p:cBhvr>
-                                      <p:tavLst>
-                                        <p:tav tm="0">
-                                          <p:val>
-                                            <p:strVal val="#ppt_x"/>
-                                          </p:val>
-                                        </p:tav>
-                                        <p:tav tm="100000">
-                                          <p:val>
-                                            <p:strVal val="#ppt_x"/>
-                                          </p:val>
-                                        </p:tav>
-                                      </p:tavLst>
-                                    </p:anim>
-                                    <p:anim calcmode="lin" valueType="num">
-                                      <p:cBhvr>
-                                        <p:cTn id="30" dur="1000" fill="hold"/>
-                                        <p:tgtEl>
-                                          <p:spTgt spid="10">
-                                            <p:txEl>
-                                              <p:pRg st="0" end="0"/>
-                                            </p:txEl>
-                                          </p:spTgt>
-                                        </p:tgtEl>
-                                        <p:attrNameLst>
-                                          <p:attrName>ppt_y</p:attrName>
-                                        </p:attrNameLst>
-                                      </p:cBhvr>
-                                      <p:tavLst>
-                                        <p:tav tm="0">
-                                          <p:val>
-                                            <p:strVal val="#ppt_y+.1"/>
-                                          </p:val>
-                                        </p:tav>
-                                        <p:tav tm="100000">
-                                          <p:val>
-                                            <p:strVal val="#ppt_y"/>
-                                          </p:val>
-                                        </p:tav>
-                                      </p:tavLst>
-                                    </p:anim>
-                                  </p:childTnLst>
-                                </p:cTn>
-                              </p:par>
-                            </p:childTnLst>
-                          </p:cTn>
-                        </p:par>
-                      </p:childTnLst>
-                    </p:cTn>
-                  </p:par>
-                </p:childTnLst>
-              </p:cTn>
-              <p:prevCondLst>
-                <p:cond evt="onPrev" delay="0">
-                  <p:tgtEl>
-                    <p:sldTgt/>
-                  </p:tgtEl>
-                </p:cond>
-              </p:prevCondLst>
-              <p:nextCondLst>
-                <p:cond evt="onNext" delay="0">
-                  <p:tgtEl>
-                    <p:sldTgt/>
-                  </p:tgtEl>
-                </p:cond>
-              </p:nextCondLst>
-            </p:seq>
-          </p:childTnLst>
-        </p:cTn>
-      </p:par>
-    </p:tnLst>
-    <p:bldLst>
-      <p:bldP spid="4" grpId="0"/>
-      <p:bldP spid="7" grpId="0"/>
-      <p:bldP spid="8" grpId="0"/>
-      <p:bldP spid="10" grpId="0" build="p"/>
-    </p:bldLst>
-  </p:timing>
 </p:sld>
 </file>
 
@@ -20037,6 +15450,15 @@
 </file>
 
 <file path=customXml/item1.xml><?xml version="1.0" encoding="utf-8"?>
+<p:properties xmlns:p="http://schemas.microsoft.com/office/2006/metadata/properties" xmlns:xsi="http://www.w3.org/2001/XMLSchema-instance" xmlns:pc="http://schemas.microsoft.com/office/infopath/2007/PartnerControls">
+  <documentManagement>
+    <Status xmlns="71af3243-3dd4-4a8d-8c0d-dd76da1f02a5">Not started</Status>
+    <MediaServiceKeyPoints xmlns="71af3243-3dd4-4a8d-8c0d-dd76da1f02a5" xsi:nil="true"/>
+  </documentManagement>
+</p:properties>
+</file>
+
+<file path=customXml/item2.xml><?xml version="1.0" encoding="utf-8"?>
 <ct:contentTypeSchema xmlns:ct="http://schemas.microsoft.com/office/2006/metadata/contentType" xmlns:ma="http://schemas.microsoft.com/office/2006/metadata/properties/metaAttributes" ct:_="" ma:_="" ma:contentTypeName="Document" ma:contentTypeID="0x01010079F111ED35F8CC479449609E8A0923A6" ma:contentTypeVersion="12" ma:contentTypeDescription="Create a new document." ma:contentTypeScope="" ma:versionID="426e97fa315356fffbdcd9876fe988c2">
   <xsd:schema xmlns:xsd="http://www.w3.org/2001/XMLSchema" xmlns:xs="http://www.w3.org/2001/XMLSchema" xmlns:p="http://schemas.microsoft.com/office/2006/metadata/properties" xmlns:ns2="71af3243-3dd4-4a8d-8c0d-dd76da1f02a5" xmlns:ns3="16c05727-aa75-4e4a-9b5f-8a80a1165891" targetNamespace="http://schemas.microsoft.com/office/2006/metadata/properties" ma:root="true" ma:fieldsID="14b8f0def80e6d70ce3def20c90759ae" ns2:_="" ns3:_="">
     <xsd:import namespace="71af3243-3dd4-4a8d-8c0d-dd76da1f02a5"/>
@@ -20257,15 +15679,6 @@
 </ct:contentTypeSchema>
 </file>
 
-<file path=customXml/item2.xml><?xml version="1.0" encoding="utf-8"?>
-<p:properties xmlns:p="http://schemas.microsoft.com/office/2006/metadata/properties" xmlns:xsi="http://www.w3.org/2001/XMLSchema-instance" xmlns:pc="http://schemas.microsoft.com/office/infopath/2007/PartnerControls">
-  <documentManagement>
-    <Status xmlns="71af3243-3dd4-4a8d-8c0d-dd76da1f02a5">Not started</Status>
-    <MediaServiceKeyPoints xmlns="71af3243-3dd4-4a8d-8c0d-dd76da1f02a5" xsi:nil="true"/>
-  </documentManagement>
-</p:properties>
-</file>
-
 <file path=customXml/item3.xml><?xml version="1.0" encoding="utf-8"?>
 <?mso-contentType ?>
 <FormTemplates xmlns="http://schemas.microsoft.com/sharepoint/v3/contenttype/forms">
@@ -20276,6 +15689,16 @@
 </file>
 
 <file path=customXml/itemProps1.xml><?xml version="1.0" encoding="utf-8"?>
+<ds:datastoreItem xmlns:ds="http://schemas.openxmlformats.org/officeDocument/2006/customXml" ds:itemID="{4DEA9014-ED64-4558-B1E1-D03F0EE32BEB}">
+  <ds:schemaRefs>
+    <ds:schemaRef ds:uri="http://schemas.microsoft.com/office/2006/metadata/properties"/>
+    <ds:schemaRef ds:uri="http://schemas.microsoft.com/office/infopath/2007/PartnerControls"/>
+    <ds:schemaRef ds:uri="71af3243-3dd4-4a8d-8c0d-dd76da1f02a5"/>
+  </ds:schemaRefs>
+</ds:datastoreItem>
+</file>
+
+<file path=customXml/itemProps2.xml><?xml version="1.0" encoding="utf-8"?>
 <ds:datastoreItem xmlns:ds="http://schemas.openxmlformats.org/officeDocument/2006/customXml" ds:itemID="{B19EB750-A6DA-4BE8-B87B-FC499FE73360}">
   <ds:schemaRefs>
     <ds:schemaRef ds:uri="http://schemas.microsoft.com/office/2006/metadata/contentType"/>
@@ -20294,16 +15717,6 @@
 </ds:datastoreItem>
 </file>
 
-<file path=customXml/itemProps2.xml><?xml version="1.0" encoding="utf-8"?>
-<ds:datastoreItem xmlns:ds="http://schemas.openxmlformats.org/officeDocument/2006/customXml" ds:itemID="{4DEA9014-ED64-4558-B1E1-D03F0EE32BEB}">
-  <ds:schemaRefs>
-    <ds:schemaRef ds:uri="http://schemas.microsoft.com/office/2006/metadata/properties"/>
-    <ds:schemaRef ds:uri="http://schemas.microsoft.com/office/infopath/2007/PartnerControls"/>
-    <ds:schemaRef ds:uri="71af3243-3dd4-4a8d-8c0d-dd76da1f02a5"/>
-  </ds:schemaRefs>
-</ds:datastoreItem>
-</file>
-
 <file path=customXml/itemProps3.xml><?xml version="1.0" encoding="utf-8"?>
 <ds:datastoreItem xmlns:ds="http://schemas.openxmlformats.org/officeDocument/2006/customXml" ds:itemID="{05D99ABA-76CE-4A8E-B5F0-C051B96628DE}">
   <ds:schemaRefs>
